--- a/report/M4/BIN381_M4_Slides_Group_P1.pptx
+++ b/report/M4/BIN381_M4_Slides_Group_P1.pptx
@@ -7476,7 +7476,7 @@
             <a:r>
               <a:rPr sz="2400" b="0" i="0">
                 <a:solidFill>
-                  <a:srgbClr val="363D46"/>
+                  <a:srgbClr val="FFFFFF"/>
                 </a:solidFill>
                 <a:latin typeface="Aptos"/>
               </a:rPr>
@@ -7515,7 +7515,7 @@
             <a:r>
               <a:rPr sz="1000" b="0" i="0">
                 <a:solidFill>
-                  <a:srgbClr val="6F6F6F"/>
+                  <a:srgbClr val="D9D9D9"/>
                 </a:solidFill>
                 <a:latin typeface="Aptos"/>
               </a:rPr>
@@ -7554,7 +7554,7 @@
             <a:r>
               <a:rPr sz="1600" b="1" i="0">
                 <a:solidFill>
-                  <a:srgbClr val="CF7133"/>
+                  <a:srgbClr val="E9A039"/>
                 </a:solidFill>
                 <a:latin typeface="Aptos"/>
               </a:rPr>
@@ -7572,7 +7572,7 @@
         <p:spPr>
           <a:xfrm>
             <a:off x="1143000" y="2514600"/>
-            <a:ext cx="4754880" cy="2926080"/>
+            <a:ext cx="4754880" cy="2560320"/>
           </a:xfrm>
           <a:prstGeom prst="rect">
             <a:avLst/>
@@ -7593,7 +7593,7 @@
             <a:r>
               <a:rPr sz="1300" b="1" i="0">
                 <a:solidFill>
-                  <a:srgbClr val="363D46"/>
+                  <a:srgbClr val="FFFFFF"/>
                 </a:solidFill>
                 <a:latin typeface="Aptos"/>
               </a:rPr>
@@ -7609,7 +7609,7 @@
             <a:r>
               <a:rPr sz="1300" b="0" i="0">
                 <a:solidFill>
-                  <a:srgbClr val="363D46"/>
+                  <a:srgbClr val="FFFFFF"/>
                 </a:solidFill>
                 <a:latin typeface="Aptos"/>
               </a:rPr>
@@ -7625,7 +7625,7 @@
             <a:r>
               <a:rPr sz="1300" b="0" i="0">
                 <a:solidFill>
-                  <a:srgbClr val="363D46"/>
+                  <a:srgbClr val="FFFFFF"/>
                 </a:solidFill>
                 <a:latin typeface="Aptos"/>
               </a:rPr>
@@ -7641,7 +7641,7 @@
             <a:r>
               <a:rPr sz="1300" b="0" i="0">
                 <a:solidFill>
-                  <a:srgbClr val="363D46"/>
+                  <a:srgbClr val="FFFFFF"/>
                 </a:solidFill>
                 <a:latin typeface="Aptos"/>
               </a:rPr>
@@ -7680,7 +7680,7 @@
             <a:r>
               <a:rPr sz="1600" b="1" i="0">
                 <a:solidFill>
-                  <a:srgbClr val="363D46"/>
+                  <a:srgbClr val="FFFFFF"/>
                 </a:solidFill>
                 <a:latin typeface="Aptos"/>
               </a:rPr>
@@ -7698,7 +7698,7 @@
         <p:spPr>
           <a:xfrm>
             <a:off x="6291072" y="2514600"/>
-            <a:ext cx="4754880" cy="2926080"/>
+            <a:ext cx="4754880" cy="2560320"/>
           </a:xfrm>
           <a:prstGeom prst="rect">
             <a:avLst/>
@@ -7719,7 +7719,7 @@
             <a:r>
               <a:rPr sz="1300" b="1" i="0">
                 <a:solidFill>
-                  <a:srgbClr val="363D46"/>
+                  <a:srgbClr val="FFFFFF"/>
                 </a:solidFill>
                 <a:latin typeface="Aptos"/>
               </a:rPr>
@@ -7735,7 +7735,7 @@
             <a:r>
               <a:rPr sz="1300" b="0" i="0">
                 <a:solidFill>
-                  <a:srgbClr val="363D46"/>
+                  <a:srgbClr val="FFFFFF"/>
                 </a:solidFill>
                 <a:latin typeface="Aptos"/>
               </a:rPr>
@@ -7751,7 +7751,7 @@
             <a:r>
               <a:rPr sz="1300" b="0" i="0">
                 <a:solidFill>
-                  <a:srgbClr val="363D46"/>
+                  <a:srgbClr val="FFFFFF"/>
                 </a:solidFill>
                 <a:latin typeface="Aptos"/>
               </a:rPr>
@@ -7767,7 +7767,7 @@
             <a:r>
               <a:rPr sz="1300" b="0" i="0">
                 <a:solidFill>
-                  <a:srgbClr val="363D46"/>
+                  <a:srgbClr val="FFFFFF"/>
                 </a:solidFill>
                 <a:latin typeface="Aptos"/>
               </a:rPr>
@@ -7784,8 +7784,8 @@
         </p:nvSpPr>
         <p:spPr>
           <a:xfrm>
-            <a:off x="1143000" y="5440680"/>
-            <a:ext cx="9902952" cy="411480"/>
+            <a:off x="1143000" y="5212080"/>
+            <a:ext cx="9902952" cy="548640"/>
           </a:xfrm>
           <a:prstGeom prst="rect">
             <a:avLst/>
@@ -7806,7 +7806,7 @@
             <a:r>
               <a:rPr sz="1600" b="1" i="0">
                 <a:solidFill>
-                  <a:srgbClr val="363D46"/>
+                  <a:srgbClr val="FFFFFF"/>
                 </a:solidFill>
                 <a:latin typeface="Aptos"/>
               </a:rPr>
@@ -9844,7 +9844,7 @@
             <a:r>
               <a:rPr sz="2400" b="0" i="0">
                 <a:solidFill>
-                  <a:srgbClr val="363D46"/>
+                  <a:srgbClr val="FFFFFF"/>
                 </a:solidFill>
                 <a:latin typeface="Aptos"/>
               </a:rPr>
@@ -9883,7 +9883,7 @@
             <a:r>
               <a:rPr sz="1000" b="0" i="0">
                 <a:solidFill>
-                  <a:srgbClr val="6F6F6F"/>
+                  <a:srgbClr val="D9D9D9"/>
                 </a:solidFill>
                 <a:latin typeface="Aptos"/>
               </a:rPr>
@@ -9946,7 +9946,7 @@
             <a:r>
               <a:rPr sz="1100" b="1" i="0">
                 <a:solidFill>
-                  <a:srgbClr val="363D46"/>
+                  <a:srgbClr val="FFFFFF"/>
                 </a:solidFill>
                 <a:latin typeface="Aptos"/>
               </a:rPr>
@@ -10009,7 +10009,7 @@
             <a:r>
               <a:rPr sz="1100" b="1" i="0">
                 <a:solidFill>
-                  <a:srgbClr val="363D46"/>
+                  <a:srgbClr val="FFFFFF"/>
                 </a:solidFill>
                 <a:latin typeface="Aptos"/>
               </a:rPr>
@@ -10072,7 +10072,7 @@
             <a:r>
               <a:rPr sz="1100" b="1" i="0">
                 <a:solidFill>
-                  <a:srgbClr val="363D46"/>
+                  <a:srgbClr val="FFFFFF"/>
                 </a:solidFill>
                 <a:latin typeface="Aptos"/>
               </a:rPr>
@@ -10111,7 +10111,7 @@
             <a:r>
               <a:rPr sz="1600" b="1" i="0">
                 <a:solidFill>
-                  <a:srgbClr val="363D46"/>
+                  <a:srgbClr val="FFFFFF"/>
                 </a:solidFill>
                 <a:latin typeface="Aptos"/>
               </a:rPr>
@@ -10194,7 +10194,7 @@
             <a:r>
               <a:rPr sz="2400" b="0" i="0">
                 <a:solidFill>
-                  <a:srgbClr val="363D46"/>
+                  <a:srgbClr val="FFFFFF"/>
                 </a:solidFill>
                 <a:latin typeface="Aptos"/>
               </a:rPr>
@@ -10646,7 +10646,7 @@
         </p:nvSpPr>
         <p:spPr>
           <a:xfrm>
-            <a:off x="1143000" y="5623560"/>
+            <a:off x="1143000" y="5852160"/>
             <a:ext cx="9902952" cy="365760"/>
           </a:xfrm>
           <a:prstGeom prst="rect">
@@ -10668,7 +10668,7 @@
             <a:r>
               <a:rPr sz="1400" b="1" i="0">
                 <a:solidFill>
-                  <a:srgbClr val="CF7133"/>
+                  <a:srgbClr val="E9A039"/>
                 </a:solidFill>
                 <a:latin typeface="Aptos"/>
               </a:rPr>

--- a/report/M4/BIN381_M4_Slides_Group_P1.pptx
+++ b/report/M4/BIN381_M4_Slides_Group_P1.pptx
@@ -4,17 +4,20 @@
   <p:sldMasterIdLst>
     <p:sldMasterId id="2147483660" r:id="rId1"/>
   </p:sldMasterIdLst>
+  <p:notesMasterIdLst>
+    <p:notesMasterId r:id="rId12"/>
+  </p:notesMasterIdLst>
   <p:sldIdLst>
     <p:sldId id="256" r:id="rId2"/>
     <p:sldId id="257" r:id="rId3"/>
     <p:sldId id="258" r:id="rId4"/>
     <p:sldId id="259" r:id="rId5"/>
-    <p:sldId id="260" r:id="rId12"/>
-    <p:sldId id="261" r:id="rId13"/>
-    <p:sldId id="262" r:id="rId14"/>
-    <p:sldId id="263" r:id="rId16"/>
-    <p:sldId id="264" r:id="rId17"/>
-    <p:sldId id="265" r:id="rId18"/>
+    <p:sldId id="260" r:id="rId6"/>
+    <p:sldId id="261" r:id="rId7"/>
+    <p:sldId id="262" r:id="rId8"/>
+    <p:sldId id="263" r:id="rId9"/>
+    <p:sldId id="264" r:id="rId10"/>
+    <p:sldId id="265" r:id="rId11"/>
   </p:sldIdLst>
   <p:sldSz cx="12192000" cy="6858000"/>
   <p:notesSz cx="6858000" cy="9144000"/>
@@ -113,6 +116,11 @@
       </a:defRPr>
     </a:lvl9pPr>
   </p:defaultTextStyle>
+  <p:extLst>
+    <p:ext uri="{EFAFB233-063F-42B5-8137-9DF3F51BA10A}">
+      <p15:sldGuideLst xmlns:p15="http://schemas.microsoft.com/office/powerpoint/2012/main"/>
+    </p:ext>
+  </p:extLst>
 </p:presentation>
 </file>
 
@@ -193,7 +201,7 @@
 </file>
 
 <file path=ppt/notesMasters/notesMaster1.xml><?xml version="1.0" encoding="utf-8"?>
-<p:notesMaster xmlns:a="http://schemas.openxmlformats.org/drawingml/2006/main" xmlns:p="http://schemas.openxmlformats.org/presentationml/2006/main" xmlns:r="http://schemas.openxmlformats.org/officeDocument/2006/relationships">
+<p:notesMaster xmlns:a="http://schemas.openxmlformats.org/drawingml/2006/main" xmlns:r="http://schemas.openxmlformats.org/officeDocument/2006/relationships" xmlns:p="http://schemas.openxmlformats.org/presentationml/2006/main">
   <p:cSld>
     <p:bg>
       <p:bgRef idx="1001">
@@ -214,241 +222,16 @@
           <a:chExt cx="0" cy="0"/>
         </a:xfrm>
       </p:grpSpPr>
-      <p:sp>
-        <p:nvSpPr>
-          <p:cNvPr id="2" name="Header Placeholder 1"/>
-          <p:cNvSpPr>
-            <a:spLocks noGrp="1"/>
-          </p:cNvSpPr>
-          <p:nvPr>
-            <p:ph type="hdr" sz="quarter"/>
-          </p:nvPr>
-        </p:nvSpPr>
-        <p:spPr>
-          <a:xfrm>
-            <a:off x="0" y="0"/>
-            <a:ext cx="2971800" cy="457200"/>
-          </a:xfrm>
-          <a:prstGeom prst="rect">
-            <a:avLst/>
-          </a:prstGeom>
-        </p:spPr>
-        <p:txBody>
-          <a:bodyPr vert="horz" lIns="91440" tIns="45720" rIns="91440" bIns="45720" rtlCol="0"/>
-          <a:lstStyle>
-            <a:lvl1pPr algn="l">
-              <a:defRPr sz="1200"/>
-            </a:lvl1pPr>
-          </a:lstStyle>
-          <a:p>
-            <a:endParaRPr lang="en-US"/>
-          </a:p>
-        </p:txBody>
-      </p:sp>
-      <p:sp>
-        <p:nvSpPr>
-          <p:cNvPr id="3" name="Date Placeholder 2"/>
-          <p:cNvSpPr>
-            <a:spLocks noGrp="1"/>
-          </p:cNvSpPr>
-          <p:nvPr>
-            <p:ph type="dt" idx="1"/>
-          </p:nvPr>
-        </p:nvSpPr>
-        <p:spPr>
-          <a:xfrm>
-            <a:off x="3884613" y="0"/>
-            <a:ext cx="2971800" cy="457200"/>
-          </a:xfrm>
-          <a:prstGeom prst="rect">
-            <a:avLst/>
-          </a:prstGeom>
-        </p:spPr>
-        <p:txBody>
-          <a:bodyPr vert="horz" lIns="91440" tIns="45720" rIns="91440" bIns="45720" rtlCol="0"/>
-          <a:lstStyle>
-            <a:lvl1pPr algn="r">
-              <a:defRPr sz="1200"/>
-            </a:lvl1pPr>
-          </a:lstStyle>
-          <a:p>
-            <a:fld id="{0F89C1C7-3DCD-1040-A9CF-14679D8B5DDD}" type="datetimeFigureOut">
-              <a:rPr lang="en-US" smtClean="0"/>
-              <a:t>10/17/16</a:t>
-            </a:fld>
-            <a:endParaRPr lang="en-US"/>
-          </a:p>
-        </p:txBody>
-      </p:sp>
-      <p:sp>
-        <p:nvSpPr>
-          <p:cNvPr id="4" name="Slide Image Placeholder 3"/>
-          <p:cNvSpPr>
-            <a:spLocks noGrp="1" noRot="1" noChangeAspect="1"/>
-          </p:cNvSpPr>
-          <p:nvPr>
-            <p:ph type="sldImg" idx="2"/>
-          </p:nvPr>
-        </p:nvSpPr>
-        <p:spPr>
-          <a:xfrm>
-            <a:off x="1143000" y="685800"/>
-            <a:ext cx="4572000" cy="3429000"/>
-          </a:xfrm>
-          <a:prstGeom prst="rect">
-            <a:avLst/>
-          </a:prstGeom>
-          <a:noFill/>
-          <a:ln w="12700">
-            <a:solidFill>
-              <a:prstClr val="black"/>
-            </a:solidFill>
-          </a:ln>
-        </p:spPr>
-        <p:txBody>
-          <a:bodyPr vert="horz" lIns="91440" tIns="45720" rIns="91440" bIns="45720" rtlCol="0" anchor="ctr"/>
-          <a:lstStyle/>
-          <a:p>
-            <a:endParaRPr lang="en-US"/>
-          </a:p>
-        </p:txBody>
-      </p:sp>
-      <p:sp>
-        <p:nvSpPr>
-          <p:cNvPr id="5" name="Notes Placeholder 4"/>
-          <p:cNvSpPr>
-            <a:spLocks noGrp="1"/>
-          </p:cNvSpPr>
-          <p:nvPr>
-            <p:ph type="body" sz="quarter" idx="3"/>
-          </p:nvPr>
-        </p:nvSpPr>
-        <p:spPr>
-          <a:xfrm>
-            <a:off x="685800" y="4343400"/>
-            <a:ext cx="5486400" cy="4114800"/>
-          </a:xfrm>
-          <a:prstGeom prst="rect">
-            <a:avLst/>
-          </a:prstGeom>
-        </p:spPr>
-        <p:txBody>
-          <a:bodyPr vert="horz" lIns="91440" tIns="45720" rIns="91440" bIns="45720" rtlCol="0"/>
-          <a:lstStyle/>
-          <a:p>
-            <a:pPr lvl="0"/>
-            <a:r>
-              <a:rPr lang="en-US" smtClean="0"/>
-              <a:t>Click to edit Master text styles</a:t>
-            </a:r>
-          </a:p>
-          <a:p>
-            <a:pPr lvl="1"/>
-            <a:r>
-              <a:rPr lang="en-US" smtClean="0"/>
-              <a:t>Second level</a:t>
-            </a:r>
-          </a:p>
-          <a:p>
-            <a:pPr lvl="2"/>
-            <a:r>
-              <a:rPr lang="en-US" smtClean="0"/>
-              <a:t>Third level</a:t>
-            </a:r>
-          </a:p>
-          <a:p>
-            <a:pPr lvl="3"/>
-            <a:r>
-              <a:rPr lang="en-US" smtClean="0"/>
-              <a:t>Fourth level</a:t>
-            </a:r>
-          </a:p>
-          <a:p>
-            <a:pPr lvl="4"/>
-            <a:r>
-              <a:rPr lang="en-US" smtClean="0"/>
-              <a:t>Fifth level</a:t>
-            </a:r>
-            <a:endParaRPr lang="en-US"/>
-          </a:p>
-        </p:txBody>
-      </p:sp>
-      <p:sp>
-        <p:nvSpPr>
-          <p:cNvPr id="6" name="Footer Placeholder 5"/>
-          <p:cNvSpPr>
-            <a:spLocks noGrp="1"/>
-          </p:cNvSpPr>
-          <p:nvPr>
-            <p:ph type="ftr" sz="quarter" idx="4"/>
-          </p:nvPr>
-        </p:nvSpPr>
-        <p:spPr>
-          <a:xfrm>
-            <a:off x="0" y="8685213"/>
-            <a:ext cx="2971800" cy="457200"/>
-          </a:xfrm>
-          <a:prstGeom prst="rect">
-            <a:avLst/>
-          </a:prstGeom>
-        </p:spPr>
-        <p:txBody>
-          <a:bodyPr vert="horz" lIns="91440" tIns="45720" rIns="91440" bIns="45720" rtlCol="0" anchor="b"/>
-          <a:lstStyle>
-            <a:lvl1pPr algn="l">
-              <a:defRPr sz="1200"/>
-            </a:lvl1pPr>
-          </a:lstStyle>
-          <a:p>
-            <a:endParaRPr lang="en-US"/>
-          </a:p>
-        </p:txBody>
-      </p:sp>
-      <p:sp>
-        <p:nvSpPr>
-          <p:cNvPr id="7" name="Slide Number Placeholder 6"/>
-          <p:cNvSpPr>
-            <a:spLocks noGrp="1"/>
-          </p:cNvSpPr>
-          <p:nvPr>
-            <p:ph type="sldNum" sz="quarter" idx="5"/>
-          </p:nvPr>
-        </p:nvSpPr>
-        <p:spPr>
-          <a:xfrm>
-            <a:off x="3884613" y="8685213"/>
-            <a:ext cx="2971800" cy="457200"/>
-          </a:xfrm>
-          <a:prstGeom prst="rect">
-            <a:avLst/>
-          </a:prstGeom>
-        </p:spPr>
-        <p:txBody>
-          <a:bodyPr vert="horz" lIns="91440" tIns="45720" rIns="91440" bIns="45720" rtlCol="0" anchor="b"/>
-          <a:lstStyle>
-            <a:lvl1pPr algn="r">
-              <a:defRPr sz="1200"/>
-            </a:lvl1pPr>
-          </a:lstStyle>
-          <a:p>
-            <a:fld id="{BB5E49A5-4136-284D-997B-48E1D791AD67}" type="slidenum">
-              <a:rPr lang="en-US" smtClean="0"/>
-              <a:t>‹#›</a:t>
-            </a:fld>
-            <a:endParaRPr lang="en-US"/>
-          </a:p>
-        </p:txBody>
-      </p:sp>
     </p:spTree>
     <p:extLst>
       <p:ext uri="{BB962C8B-B14F-4D97-AF65-F5344CB8AC3E}">
-        <p14:creationId xmlns:p14="http://schemas.microsoft.com/office/powerpoint/2010/main" val="2623252185"/>
+        <p14:creationId xmlns:p14="http://schemas.microsoft.com/office/powerpoint/2010/main" val="89618043"/>
       </p:ext>
     </p:extLst>
   </p:cSld>
   <p:clrMap bg1="lt1" tx1="dk1" bg2="lt2" tx2="dk2" accent1="accent1" accent2="accent2" accent3="accent3" accent4="accent4" accent5="accent5" accent6="accent6" hlink="hlink" folHlink="folHlink"/>
   <p:notesStyle>
-    <a:lvl1pPr marL="0" algn="l" defTabSz="457200" rtl="0" eaLnBrk="1" latinLnBrk="0" hangingPunct="1">
+    <a:lvl1pPr marL="0" algn="l" defTabSz="914400" rtl="0" eaLnBrk="1" latinLnBrk="0" hangingPunct="1">
       <a:defRPr sz="1200" kern="1200">
         <a:solidFill>
           <a:schemeClr val="tx1"/>
@@ -458,7 +241,7 @@
         <a:cs typeface="+mn-cs"/>
       </a:defRPr>
     </a:lvl1pPr>
-    <a:lvl2pPr marL="457200" algn="l" defTabSz="457200" rtl="0" eaLnBrk="1" latinLnBrk="0" hangingPunct="1">
+    <a:lvl2pPr marL="457200" algn="l" defTabSz="914400" rtl="0" eaLnBrk="1" latinLnBrk="0" hangingPunct="1">
       <a:defRPr sz="1200" kern="1200">
         <a:solidFill>
           <a:schemeClr val="tx1"/>
@@ -468,7 +251,7 @@
         <a:cs typeface="+mn-cs"/>
       </a:defRPr>
     </a:lvl2pPr>
-    <a:lvl3pPr marL="914400" algn="l" defTabSz="457200" rtl="0" eaLnBrk="1" latinLnBrk="0" hangingPunct="1">
+    <a:lvl3pPr marL="914400" algn="l" defTabSz="914400" rtl="0" eaLnBrk="1" latinLnBrk="0" hangingPunct="1">
       <a:defRPr sz="1200" kern="1200">
         <a:solidFill>
           <a:schemeClr val="tx1"/>
@@ -478,7 +261,7 @@
         <a:cs typeface="+mn-cs"/>
       </a:defRPr>
     </a:lvl3pPr>
-    <a:lvl4pPr marL="1371600" algn="l" defTabSz="457200" rtl="0" eaLnBrk="1" latinLnBrk="0" hangingPunct="1">
+    <a:lvl4pPr marL="1371600" algn="l" defTabSz="914400" rtl="0" eaLnBrk="1" latinLnBrk="0" hangingPunct="1">
       <a:defRPr sz="1200" kern="1200">
         <a:solidFill>
           <a:schemeClr val="tx1"/>
@@ -488,7 +271,7 @@
         <a:cs typeface="+mn-cs"/>
       </a:defRPr>
     </a:lvl4pPr>
-    <a:lvl5pPr marL="1828800" algn="l" defTabSz="457200" rtl="0" eaLnBrk="1" latinLnBrk="0" hangingPunct="1">
+    <a:lvl5pPr marL="1828800" algn="l" defTabSz="914400" rtl="0" eaLnBrk="1" latinLnBrk="0" hangingPunct="1">
       <a:defRPr sz="1200" kern="1200">
         <a:solidFill>
           <a:schemeClr val="tx1"/>
@@ -498,7 +281,7 @@
         <a:cs typeface="+mn-cs"/>
       </a:defRPr>
     </a:lvl5pPr>
-    <a:lvl6pPr marL="2286000" algn="l" defTabSz="457200" rtl="0" eaLnBrk="1" latinLnBrk="0" hangingPunct="1">
+    <a:lvl6pPr marL="2286000" algn="l" defTabSz="914400" rtl="0" eaLnBrk="1" latinLnBrk="0" hangingPunct="1">
       <a:defRPr sz="1200" kern="1200">
         <a:solidFill>
           <a:schemeClr val="tx1"/>
@@ -508,7 +291,7 @@
         <a:cs typeface="+mn-cs"/>
       </a:defRPr>
     </a:lvl6pPr>
-    <a:lvl7pPr marL="2743200" algn="l" defTabSz="457200" rtl="0" eaLnBrk="1" latinLnBrk="0" hangingPunct="1">
+    <a:lvl7pPr marL="2743200" algn="l" defTabSz="914400" rtl="0" eaLnBrk="1" latinLnBrk="0" hangingPunct="1">
       <a:defRPr sz="1200" kern="1200">
         <a:solidFill>
           <a:schemeClr val="tx1"/>
@@ -518,7 +301,7 @@
         <a:cs typeface="+mn-cs"/>
       </a:defRPr>
     </a:lvl7pPr>
-    <a:lvl8pPr marL="3200400" algn="l" defTabSz="457200" rtl="0" eaLnBrk="1" latinLnBrk="0" hangingPunct="1">
+    <a:lvl8pPr marL="3200400" algn="l" defTabSz="914400" rtl="0" eaLnBrk="1" latinLnBrk="0" hangingPunct="1">
       <a:defRPr sz="1200" kern="1200">
         <a:solidFill>
           <a:schemeClr val="tx1"/>
@@ -528,7 +311,7 @@
         <a:cs typeface="+mn-cs"/>
       </a:defRPr>
     </a:lvl8pPr>
-    <a:lvl9pPr marL="3657600" algn="l" defTabSz="457200" rtl="0" eaLnBrk="1" latinLnBrk="0" hangingPunct="1">
+    <a:lvl9pPr marL="3657600" algn="l" defTabSz="914400" rtl="0" eaLnBrk="1" latinLnBrk="0" hangingPunct="1">
       <a:defRPr sz="1200" kern="1200">
         <a:solidFill>
           <a:schemeClr val="tx1"/>
@@ -543,7 +326,7 @@
 </file>
 
 <file path=ppt/notesSlides/notesSlide1.xml><?xml version="1.0" encoding="utf-8"?>
-<p:notes xmlns:a="http://schemas.openxmlformats.org/drawingml/2006/main" xmlns:p="http://schemas.openxmlformats.org/presentationml/2006/main" xmlns:r="http://schemas.openxmlformats.org/officeDocument/2006/relationships">
+<p:notes xmlns:a="http://schemas.openxmlformats.org/drawingml/2006/main" xmlns:r="http://schemas.openxmlformats.org/officeDocument/2006/relationships" xmlns:p="http://schemas.openxmlformats.org/presentationml/2006/main">
   <p:cSld>
     <p:spTree>
       <p:nvGrpSpPr>
@@ -563,7 +346,7 @@
         <p:nvSpPr>
           <p:cNvPr id="2" name="Slide Image Placeholder 1"/>
           <p:cNvSpPr>
-            <a:spLocks noGrp="1"/>
+            <a:spLocks noGrp="1" noRot="1" noChangeAspect="1"/>
           </p:cNvSpPr>
           <p:nvPr>
             <p:ph type="sldImg" idx="2"/>
@@ -578,7 +361,7 @@
             <a:spLocks noGrp="1"/>
           </p:cNvSpPr>
           <p:nvPr>
-            <p:ph type="body" idx="3" sz="quarter"/>
+            <p:ph type="body" sz="quarter" idx="3"/>
           </p:nvPr>
         </p:nvSpPr>
         <p:spPr/>
@@ -587,19 +370,7 @@
           <a:lstStyle/>
           <a:p>
             <a:r>
-              <a:t>We chose the threshold before we looked at the test data, with a rule agreed up front: find at least 80% of at-risk households at the fewest referrals. That lands on 0.24. On data the model had never seen it finds 80.7% of at-risk households, and 85.7% of the severely food insecure.</a:t>
-            </a:r>
-          </a:p>
-          <a:p/>
-          <a:p>
-            <a:r>
-              <a:t>The cost is the orange line. Four in ten referrals turn out to be food secure, and we send three in five households for follow-up. That is a dial, not a fact: raise the threshold and you visit fewer households but miss more. The dashboard lets programme managers set it against the capacity they actually have.</a:t>
-            </a:r>
-          </a:p>
-          <a:p/>
-          <a:p>
-            <a:r>
-              <a:t>A random forest scored slightly better (about 0.009 AUC). We kept the logistic model because every referral has to be explained to an official, and it gives one interpretable odds ratio per factor.</a:t>
+              <a:t>Our question was a targeting one: when the institute can only follow up a fraction of households, which ones should it visit first? 20,940 households in the survey, three in ten at risk. What we built is a screen that ranks them - not a test of who qualifies for anything. Alexander takes the problem, the data and the modelling; Rudi the results and the dashboard; Timothy the app, the recommendations and the limits.</a:t>
             </a:r>
           </a:p>
         </p:txBody>
@@ -611,7 +382,7 @@
             <a:spLocks noGrp="1"/>
           </p:cNvSpPr>
           <p:nvPr>
-            <p:ph type="sldNum" idx="5" sz="quarter"/>
+            <p:ph type="sldNum" sz="quarter" idx="5"/>
           </p:nvPr>
         </p:nvSpPr>
         <p:spPr/>
@@ -625,7 +396,7 @@
 </file>
 
 <file path=ppt/notesSlides/notesSlide10.xml><?xml version="1.0" encoding="utf-8"?>
-<p:notes xmlns:a="http://schemas.openxmlformats.org/drawingml/2006/main" xmlns:p="http://schemas.openxmlformats.org/presentationml/2006/main" xmlns:r="http://schemas.openxmlformats.org/officeDocument/2006/relationships">
+<p:notes xmlns:a="http://schemas.openxmlformats.org/drawingml/2006/main" xmlns:r="http://schemas.openxmlformats.org/officeDocument/2006/relationships" xmlns:p="http://schemas.openxmlformats.org/presentationml/2006/main">
   <p:cSld>
     <p:spTree>
       <p:nvGrpSpPr>
@@ -645,7 +416,7 @@
         <p:nvSpPr>
           <p:cNvPr id="2" name="Slide Image Placeholder 1"/>
           <p:cNvSpPr>
-            <a:spLocks noGrp="1"/>
+            <a:spLocks noGrp="1" noRot="1" noChangeAspect="1"/>
           </p:cNvSpPr>
           <p:nvPr>
             <p:ph type="sldImg" idx="2"/>
@@ -660,7 +431,7 @@
             <a:spLocks noGrp="1"/>
           </p:cNvSpPr>
           <p:nvPr>
-            <p:ph type="body" idx="3" sz="quarter"/>
+            <p:ph type="body" sz="quarter" idx="3"/>
           </p:nvPr>
         </p:nvSpPr>
         <p:spPr/>
@@ -669,7 +440,84 @@
           <a:lstStyle/>
           <a:p>
             <a:r>
-              <a:t>We tuned three model families with stratified five-fold cross-validation, with all preprocessing re-learned inside each fold. The three-tier target failed on the middle tier - no three-tier model recalls more than 3.2% of those households - and we had written the binary fallback down in advance rather than inventing it afterwards. Class weights were tested and rejected: they helped recall but wrecked the probabilities, and the app reports a probability.</a:t>
+              <a:t>We would rather say these ourselves than have them found.</a:t>
+            </a:r>
+          </a:p>
+          <a:p>
+            <a:endParaRPr/>
+          </a:p>
+          <a:p>
+            <a:r>
+              <a:t>An AUC of 0.736 is moderate. It separates risk better than chance by a useful margin, and it is</a:t>
+            </a:r>
+          </a:p>
+          <a:p>
+            <a:r>
+              <a:t>nowhere near good enough to decide anything on its own - which is exactly why the design keeps a</a:t>
+            </a:r>
+          </a:p>
+          <a:p>
+            <a:r>
+              <a:t>person in the loop and why we talk about referrals rather than decisions.</a:t>
+            </a:r>
+          </a:p>
+          <a:p>
+            <a:endParaRPr/>
+          </a:p>
+          <a:p>
+            <a:r>
+              <a:t>The deeper limitation is the target. We never observed whether a household went without food. We</a:t>
+            </a:r>
+          </a:p>
+          <a:p>
+            <a:r>
+              <a:t>built a proxy out of eight survey answers and predicted it from seven other answers about the same</a:t>
+            </a:r>
+          </a:p>
+          <a:p>
+            <a:r>
+              <a:t>household at the same moment. That tells you who looks like the households that report hunger. It</a:t>
+            </a:r>
+          </a:p>
+          <a:p>
+            <a:r>
+              <a:t>does not tell you why, and it cannot tell you what would change if you intervened. The reversed</a:t>
+            </a:r>
+          </a:p>
+          <a:p>
+            <a:r>
+              <a:t>grant result is the clearest case: targeting and effect cannot be separated in one cross-section.</a:t>
+            </a:r>
+          </a:p>
+          <a:p>
+            <a:endParaRPr/>
+          </a:p>
+          <a:p>
+            <a:r>
+              <a:t>So the first thing on the right matters most. The moment officials record what they actually found</a:t>
+            </a:r>
+          </a:p>
+          <a:p>
+            <a:r>
+              <a:t>when they visited, we can retrain on real outcomes instead of a survey proxy, and measure precision</a:t>
+            </a:r>
+          </a:p>
+          <a:p>
+            <a:r>
+              <a:t>in the field rather than against our own label.</a:t>
+            </a:r>
+          </a:p>
+          <a:p>
+            <a:endParaRPr/>
+          </a:p>
+          <a:p>
+            <a:r>
+              <a:t>Until then, the honest summary is the line at the bottom. Thank you - we are happy to take</a:t>
+            </a:r>
+          </a:p>
+          <a:p>
+            <a:r>
+              <a:t>questions on any slide.</a:t>
             </a:r>
           </a:p>
         </p:txBody>
@@ -681,7 +529,7 @@
             <a:spLocks noGrp="1"/>
           </p:cNvSpPr>
           <p:nvPr>
-            <p:ph type="sldNum" idx="5" sz="quarter"/>
+            <p:ph type="sldNum" sz="quarter" idx="5"/>
           </p:nvPr>
         </p:nvSpPr>
         <p:spPr/>
@@ -695,7 +543,7 @@
 </file>
 
 <file path=ppt/notesSlides/notesSlide2.xml><?xml version="1.0" encoding="utf-8"?>
-<p:notes xmlns:a="http://schemas.openxmlformats.org/drawingml/2006/main" xmlns:p="http://schemas.openxmlformats.org/presentationml/2006/main" xmlns:r="http://schemas.openxmlformats.org/officeDocument/2006/relationships">
+<p:notes xmlns:a="http://schemas.openxmlformats.org/drawingml/2006/main" xmlns:r="http://schemas.openxmlformats.org/officeDocument/2006/relationships" xmlns:p="http://schemas.openxmlformats.org/presentationml/2006/main">
   <p:cSld>
     <p:spTree>
       <p:nvGrpSpPr>
@@ -715,7 +563,7 @@
         <p:nvSpPr>
           <p:cNvPr id="2" name="Slide Image Placeholder 1"/>
           <p:cNvSpPr>
-            <a:spLocks noGrp="1"/>
+            <a:spLocks noGrp="1" noRot="1" noChangeAspect="1"/>
           </p:cNvSpPr>
           <p:nvPr>
             <p:ph type="sldImg" idx="2"/>
@@ -730,7 +578,7 @@
             <a:spLocks noGrp="1"/>
           </p:cNvSpPr>
           <p:nvPr>
-            <p:ph type="body" idx="3" sz="quarter"/>
+            <p:ph type="body" sz="quarter" idx="3"/>
           </p:nvPr>
         </p:nvSpPr>
         <p:spPr/>
@@ -739,19 +587,7 @@
           <a:lstStyle/>
           <a:p>
             <a:r>
-              <a:t>The strongest single signal is not income level, it is income change. Whether a household is worse off than a year ago matters about two and a half times more than any other answer, and it can be asked at intake in one sentence.</a:t>
-            </a:r>
-          </a:p>
-          <a:p/>
-          <a:p>
-            <a:r>
-              <a:t>Grant households are more food insecure, not less: 37.6% against 20.6%. That is not evidence that grants cause harm. Grants are means-tested, so they mark households that were already poor, and one survey wave cannot separate targeting from effect.</a:t>
-            </a:r>
-          </a:p>
-          <a:p/>
-          <a:p>
-            <a:r>
-              <a:t>The right-hand chart is the honest limitation. The screen finds 94% of at-risk households earning under R2,500 and only 39% above R11,500. It is weakest exactly where food insecurity is least expected, so a lower-risk result is not clearance, and self-referral stays open.</a:t>
+              <a:t>Three goals from Milestone 1: rank the indicators, build an interpretable model without leakage, and give decision-makers self-service exploration. We followed CRISP-DM in order and went back three times when the evidence demanded it - the key repair, the duplicate-ID finding, and the move to a binary target. The dashed arrows on the diagram are those three returns.</a:t>
             </a:r>
           </a:p>
         </p:txBody>
@@ -763,7 +599,7 @@
             <a:spLocks noGrp="1"/>
           </p:cNvSpPr>
           <p:nvPr>
-            <p:ph type="sldNum" idx="5" sz="quarter"/>
+            <p:ph type="sldNum" sz="quarter" idx="5"/>
           </p:nvPr>
         </p:nvSpPr>
         <p:spPr/>
@@ -777,7 +613,7 @@
 </file>
 
 <file path=ppt/notesSlides/notesSlide3.xml><?xml version="1.0" encoding="utf-8"?>
-<p:notes xmlns:a="http://schemas.openxmlformats.org/drawingml/2006/main" xmlns:p="http://schemas.openxmlformats.org/presentationml/2006/main" xmlns:r="http://schemas.openxmlformats.org/officeDocument/2006/relationships">
+<p:notes xmlns:a="http://schemas.openxmlformats.org/drawingml/2006/main" xmlns:r="http://schemas.openxmlformats.org/officeDocument/2006/relationships" xmlns:p="http://schemas.openxmlformats.org/presentationml/2006/main">
   <p:cSld>
     <p:spTree>
       <p:nvGrpSpPr>
@@ -797,7 +633,7 @@
         <p:nvSpPr>
           <p:cNvPr id="2" name="Slide Image Placeholder 1"/>
           <p:cNvSpPr>
-            <a:spLocks noGrp="1"/>
+            <a:spLocks noGrp="1" noRot="1" noChangeAspect="1"/>
           </p:cNvSpPr>
           <p:nvPr>
             <p:ph type="sldImg" idx="2"/>
@@ -812,7 +648,7 @@
             <a:spLocks noGrp="1"/>
           </p:cNvSpPr>
           <p:nvPr>
-            <p:ph type="body" idx="3" sz="quarter"/>
+            <p:ph type="body" sz="quarter" idx="3"/>
           </p:nvPr>
         </p:nvSpPr>
         <p:spPr/>
@@ -821,42 +657,7 @@
           <a:lstStyle/>
           <a:p>
             <a:r>
-              <a:t>Have the dashboard open before the talk starts.</a:t>
-            </a:r>
-          </a:p>
-          <a:p>
-            <a:r>
-              <a:t>1. Overview page: six decision questions, every page answers one of them.</a:t>
-            </a:r>
-          </a:p>
-          <a:p>
-            <a:r>
-              <a:t>2. 'How well the screen works': the four cards are the slide 5 numbers, live from the final dataset.</a:t>
-            </a:r>
-          </a:p>
-          <a:p>
-            <a:r>
-              <a:t>3. Set the threshold to 0.30: recall drops from 80.7% to 67.8% and referrals from 59% to 44%, about 150 fewer households per thousand to visit and roughly one in eight at-risk households newly missed. Put it back to 0.24.</a:t>
-            </a:r>
-          </a:p>
-          <a:p>
-            <a:r>
-              <a:t>4. 'Who the screen misses': click through income, grants and province. Income above R11,500 sits far outside the tolerance band, a documented limitation.</a:t>
-            </a:r>
-          </a:p>
-          <a:p>
-            <a:r>
-              <a:t>5. 'What drives risk': income change at the top, odds ratios with confidence intervals.</a:t>
-            </a:r>
-          </a:p>
-          <a:p>
-            <a:r>
-              <a:t>6. Hand over to Timothy for the Shiny app.</a:t>
-            </a:r>
-          </a:p>
-          <a:p>
-            <a:r>
-              <a:t>If the live demo fails, use this screenshot and slides 5 and 6, and keep going.</a:t>
+              <a:t>Seven of the eleven files are household-level and were kept. D01 to D03 are person-level and D11 is a different survey with no shared household IDs, so both were left out with reasons. The joins are guarded one-to-one joins that stop rather than drop a household: 15 placeholder keys in D05 were repaired, not discarded. Sixteen columns that define or proxy the target are excluded from the predictors, and the notebook fails if one appears.</a:t>
             </a:r>
           </a:p>
         </p:txBody>
@@ -868,7 +669,7 @@
             <a:spLocks noGrp="1"/>
           </p:cNvSpPr>
           <p:nvPr>
-            <p:ph type="sldNum" idx="5" sz="quarter"/>
+            <p:ph type="sldNum" sz="quarter" idx="5"/>
           </p:nvPr>
         </p:nvSpPr>
         <p:spPr/>
@@ -882,7 +683,7 @@
 </file>
 
 <file path=ppt/notesSlides/notesSlide4.xml><?xml version="1.0" encoding="utf-8"?>
-<p:notes xmlns:a="http://schemas.openxmlformats.org/drawingml/2006/main" xmlns:p="http://schemas.openxmlformats.org/presentationml/2006/main" xmlns:r="http://schemas.openxmlformats.org/officeDocument/2006/relationships">
+<p:notes xmlns:a="http://schemas.openxmlformats.org/drawingml/2006/main" xmlns:r="http://schemas.openxmlformats.org/officeDocument/2006/relationships" xmlns:p="http://schemas.openxmlformats.org/presentationml/2006/main">
   <p:cSld>
     <p:spTree>
       <p:nvGrpSpPr>
@@ -902,7 +703,7 @@
         <p:nvSpPr>
           <p:cNvPr id="2" name="Slide Image Placeholder 1"/>
           <p:cNvSpPr>
-            <a:spLocks noGrp="1"/>
+            <a:spLocks noGrp="1" noRot="1" noChangeAspect="1"/>
           </p:cNvSpPr>
           <p:nvPr>
             <p:ph type="sldImg" idx="2"/>
@@ -917,7 +718,7 @@
             <a:spLocks noGrp="1"/>
           </p:cNvSpPr>
           <p:nvPr>
-            <p:ph type="body" idx="3" sz="quarter"/>
+            <p:ph type="body" sz="quarter" idx="3"/>
           </p:nvPr>
         </p:nvSpPr>
         <p:spPr/>
@@ -926,90 +727,7 @@
           <a:lstStyle/>
           <a:p>
             <a:r>
-              <a:t>Live demo, in this order:</a:t>
-            </a:r>
-          </a:p>
-          <a:p/>
-          <a:p>
-            <a:r>
-              <a:t>1. One household. Type the rural example: income fell sharply, no electricity, six people,</a:t>
-            </a:r>
-          </a:p>
-          <a:p>
-            <a:r>
-              <a:t>   R1,200 a month, two grant recipients, pit latrine. Score it. Point at the three factors the app</a:t>
-            </a:r>
-          </a:p>
-          <a:p>
-            <a:r>
-              <a:t>   gives back, and at the words it uses - "Higher risk: refer for review", never "food insecure".</a:t>
-            </a:r>
-          </a:p>
-          <a:p>
-            <a:r>
-              <a:t>2. The contrast. Change income to R30,000 and settlement to urban, re-score, and let the</a:t>
-            </a:r>
-          </a:p>
-          <a:p>
-            <a:r>
-              <a:t>   probability drop. That is the whole model in one gesture.</a:t>
-            </a:r>
-          </a:p>
-          <a:p>
-            <a:r>
-              <a:t>3. The batch. Upload tests/messy_households.csv - 13 deliberately broken rows. Scroll the issues</a:t>
-            </a:r>
-          </a:p>
-          <a:p>
-            <a:r>
-              <a:t>   table: sentinel codes recoded, an impossible household size rejected, a duplicate identifier</a:t>
-            </a:r>
-          </a:p>
-          <a:p>
-            <a:r>
-              <a:t>   flagged, rows with too much missing left unscored rather than guessed.</a:t>
-            </a:r>
-          </a:p>
-          <a:p>
-            <a:r>
-              <a:t>4. The limits page. Land here, not on a score. Read the two lines about which households the</a:t>
-            </a:r>
-          </a:p>
-          <a:p>
-            <a:r>
-              <a:t>   screen misses.</a:t>
-            </a:r>
-          </a:p>
-          <a:p/>
-          <a:p>
-            <a:r>
-              <a:t>This is the part a field officer actually touches. Seven questions, short enough to ask at a door,</a:t>
-            </a:r>
-          </a:p>
-          <a:p>
-            <a:r>
-              <a:t>and the answer comes back with the three things that drove it - so the officer can say why a</a:t>
-            </a:r>
-          </a:p>
-          <a:p>
-            <a:r>
-              <a:t>household was referred, and a supervisor can disagree with it.</a:t>
-            </a:r>
-          </a:p>
-          <a:p/>
-          <a:p>
-            <a:r>
-              <a:t>Likely question - what happens if someone uploads real household IDs? They stay in the file and</a:t>
-            </a:r>
-          </a:p>
-          <a:p>
-            <a:r>
-              <a:t>never leave the machine. Uploads are processed in memory and not written to disk, identifiers are</a:t>
-            </a:r>
-          </a:p>
-          <a:p>
-            <a:r>
-              <a:t>never returned in the download, and the monitoring log keeps totals only.</a:t>
+              <a:t>We tuned three model families with stratified five-fold cross-validation, with all preprocessing re-learned inside each fold. The three-tier target failed on the middle tier - no three-tier model recalls more than 3.2% of those households - and we had written the binary fallback down in advance rather than inventing it afterwards. Class weights were tested and rejected: they helped recall but wrecked the probabilities, and the app reports a probability.</a:t>
             </a:r>
           </a:p>
         </p:txBody>
@@ -1021,7 +739,7 @@
             <a:spLocks noGrp="1"/>
           </p:cNvSpPr>
           <p:nvPr>
-            <p:ph type="sldNum" idx="5" sz="quarter"/>
+            <p:ph type="sldNum" sz="quarter" idx="5"/>
           </p:nvPr>
         </p:nvSpPr>
         <p:spPr/>
@@ -1035,7 +753,7 @@
 </file>
 
 <file path=ppt/notesSlides/notesSlide5.xml><?xml version="1.0" encoding="utf-8"?>
-<p:notes xmlns:a="http://schemas.openxmlformats.org/drawingml/2006/main" xmlns:p="http://schemas.openxmlformats.org/presentationml/2006/main" xmlns:r="http://schemas.openxmlformats.org/officeDocument/2006/relationships">
+<p:notes xmlns:a="http://schemas.openxmlformats.org/drawingml/2006/main" xmlns:r="http://schemas.openxmlformats.org/officeDocument/2006/relationships" xmlns:p="http://schemas.openxmlformats.org/presentationml/2006/main">
   <p:cSld>
     <p:spTree>
       <p:nvGrpSpPr>
@@ -1055,7 +773,7 @@
         <p:nvSpPr>
           <p:cNvPr id="2" name="Slide Image Placeholder 1"/>
           <p:cNvSpPr>
-            <a:spLocks noGrp="1"/>
+            <a:spLocks noGrp="1" noRot="1" noChangeAspect="1"/>
           </p:cNvSpPr>
           <p:nvPr>
             <p:ph type="sldImg" idx="2"/>
@@ -1070,7 +788,7 @@
             <a:spLocks noGrp="1"/>
           </p:cNvSpPr>
           <p:nvPr>
-            <p:ph type="body" idx="3" sz="quarter"/>
+            <p:ph type="body" sz="quarter" idx="3"/>
           </p:nvPr>
         </p:nvSpPr>
         <p:spPr/>
@@ -1079,86 +797,23 @@
           <a:lstStyle/>
           <a:p>
             <a:r>
-              <a:t>Each of these starts from a number on Rudi's slides, and each has a limit attached, because the</a:t>
-            </a:r>
-          </a:p>
-          <a:p>
-            <a:r>
-              <a:t>limits are what make them safe to act on.</a:t>
-            </a:r>
-          </a:p>
-          <a:p/>
-          <a:p>
-            <a:r>
-              <a:t>The first is a budget decision disguised as a technical one. At our threshold the tool refers about</a:t>
-            </a:r>
-          </a:p>
-          <a:p>
-            <a:r>
-              <a:t>three households in five, and about four in ten of those referrals turn out to be food secure. That</a:t>
-            </a:r>
-          </a:p>
-          <a:p>
-            <a:r>
-              <a:t>is the cost of finding four in five of the households that are at risk. Managers should size</a:t>
-            </a:r>
-          </a:p>
-          <a:p>
-            <a:r>
-              <a:t>follow-up capacity against that rate before go-live - or move the threshold knowingly, which the</a:t>
-            </a:r>
-          </a:p>
-          <a:p>
-            <a:r>
-              <a:t>dashboard lets them do, and accept that they will miss more people.</a:t>
-            </a:r>
-          </a:p>
-          <a:p/>
-          <a:p>
-            <a:r>
-              <a:t>The second is the cheapest thing on this list. One question about whether income has fallen carries</a:t>
-            </a:r>
-          </a:p>
-          <a:p>
-            <a:r>
-              <a:t>more signal than anything else we measured, and it can be asked without the model at all.</a:t>
-            </a:r>
-          </a:p>
-          <a:p/>
-          <a:p>
-            <a:r>
-              <a:t>The third needs the caution said out loud. Grant-receiving households are at higher risk because</a:t>
-            </a:r>
-          </a:p>
-          <a:p>
-            <a:r>
-              <a:t>grants are targeted at poor households. That is a reason to use the registers to find people</a:t>
-            </a:r>
-          </a:p>
-          <a:p>
-            <a:r>
-              <a:t>quickly. It is not evidence that grants cause food insecurity.</a:t>
-            </a:r>
-          </a:p>
-          <a:p/>
-          <a:p>
-            <a:r>
-              <a:t>The last one is there because of what we found about ourselves. The screen is weakest for</a:t>
-            </a:r>
-          </a:p>
-          <a:p>
-            <a:r>
-              <a:t>households that do not look poor on our seven inputs. We chose not to patch that with a different</a:t>
-            </a:r>
-          </a:p>
-          <a:p>
-            <a:r>
-              <a:t>threshold for richer households, because that means treating people differently by income on the</a:t>
-            </a:r>
-          </a:p>
-          <a:p>
-            <a:r>
-              <a:t>basis of a proxy. We publish the gap instead, and ask for a monthly audit. Keep self-referral open.</a:t>
+              <a:t>We chose the threshold before we looked at the test data, with a rule agreed up front: find at least 80% of at-risk households at the fewest referrals. That lands on 0.24. On data the model had never seen it finds 80.7% of at-risk households, and 85.7% of the severely food insecure.</a:t>
+            </a:r>
+          </a:p>
+          <a:p>
+            <a:endParaRPr/>
+          </a:p>
+          <a:p>
+            <a:r>
+              <a:t>The cost is the orange line. Four in ten referrals turn out to be food secure, and we send three in five households for follow-up. That is a dial, not a fact: raise the threshold and you visit fewer households but miss more. The dashboard lets programme managers set it against the capacity they actually have.</a:t>
+            </a:r>
+          </a:p>
+          <a:p>
+            <a:endParaRPr/>
+          </a:p>
+          <a:p>
+            <a:r>
+              <a:t>A random forest scored slightly better (about 0.009 AUC). We kept the logistic model because every referral has to be explained to an official, and it gives one interpretable odds ratio per factor.</a:t>
             </a:r>
           </a:p>
         </p:txBody>
@@ -1170,7 +825,7 @@
             <a:spLocks noGrp="1"/>
           </p:cNvSpPr>
           <p:nvPr>
-            <p:ph type="sldNum" idx="5" sz="quarter"/>
+            <p:ph type="sldNum" sz="quarter" idx="5"/>
           </p:nvPr>
         </p:nvSpPr>
         <p:spPr/>
@@ -1184,7 +839,7 @@
 </file>
 
 <file path=ppt/notesSlides/notesSlide6.xml><?xml version="1.0" encoding="utf-8"?>
-<p:notes xmlns:a="http://schemas.openxmlformats.org/drawingml/2006/main" xmlns:p="http://schemas.openxmlformats.org/presentationml/2006/main" xmlns:r="http://schemas.openxmlformats.org/officeDocument/2006/relationships">
+<p:notes xmlns:a="http://schemas.openxmlformats.org/drawingml/2006/main" xmlns:r="http://schemas.openxmlformats.org/officeDocument/2006/relationships" xmlns:p="http://schemas.openxmlformats.org/presentationml/2006/main">
   <p:cSld>
     <p:spTree>
       <p:nvGrpSpPr>
@@ -1204,7 +859,7 @@
         <p:nvSpPr>
           <p:cNvPr id="2" name="Slide Image Placeholder 1"/>
           <p:cNvSpPr>
-            <a:spLocks noGrp="1"/>
+            <a:spLocks noGrp="1" noRot="1" noChangeAspect="1"/>
           </p:cNvSpPr>
           <p:nvPr>
             <p:ph type="sldImg" idx="2"/>
@@ -1219,7 +874,7 @@
             <a:spLocks noGrp="1"/>
           </p:cNvSpPr>
           <p:nvPr>
-            <p:ph type="body" idx="3" sz="quarter"/>
+            <p:ph type="body" sz="quarter" idx="3"/>
           </p:nvPr>
         </p:nvSpPr>
         <p:spPr/>
@@ -1228,76 +883,23 @@
           <a:lstStyle/>
           <a:p>
             <a:r>
-              <a:t>We would rather say these ourselves than have them found.</a:t>
-            </a:r>
-          </a:p>
-          <a:p/>
-          <a:p>
-            <a:r>
-              <a:t>An AUC of 0.736 is moderate. It separates risk better than chance by a useful margin, and it is</a:t>
-            </a:r>
-          </a:p>
-          <a:p>
-            <a:r>
-              <a:t>nowhere near good enough to decide anything on its own - which is exactly why the design keeps a</a:t>
-            </a:r>
-          </a:p>
-          <a:p>
-            <a:r>
-              <a:t>person in the loop and why we talk about referrals rather than decisions.</a:t>
-            </a:r>
-          </a:p>
-          <a:p/>
-          <a:p>
-            <a:r>
-              <a:t>The deeper limitation is the target. We never observed whether a household went without food. We</a:t>
-            </a:r>
-          </a:p>
-          <a:p>
-            <a:r>
-              <a:t>built a proxy out of eight survey answers and predicted it from seven other answers about the same</a:t>
-            </a:r>
-          </a:p>
-          <a:p>
-            <a:r>
-              <a:t>household at the same moment. That tells you who looks like the households that report hunger. It</a:t>
-            </a:r>
-          </a:p>
-          <a:p>
-            <a:r>
-              <a:t>does not tell you why, and it cannot tell you what would change if you intervened. The reversed</a:t>
-            </a:r>
-          </a:p>
-          <a:p>
-            <a:r>
-              <a:t>grant result is the clearest case: targeting and effect cannot be separated in one cross-section.</a:t>
-            </a:r>
-          </a:p>
-          <a:p/>
-          <a:p>
-            <a:r>
-              <a:t>So the first thing on the right matters most. The moment officials record what they actually found</a:t>
-            </a:r>
-          </a:p>
-          <a:p>
-            <a:r>
-              <a:t>when they visited, we can retrain on real outcomes instead of a survey proxy, and measure precision</a:t>
-            </a:r>
-          </a:p>
-          <a:p>
-            <a:r>
-              <a:t>in the field rather than against our own label.</a:t>
-            </a:r>
-          </a:p>
-          <a:p/>
-          <a:p>
-            <a:r>
-              <a:t>Until then, the honest summary is the line at the bottom. Thank you - we are happy to take</a:t>
-            </a:r>
-          </a:p>
-          <a:p>
-            <a:r>
-              <a:t>questions on any slide.</a:t>
+              <a:t>The strongest single signal is not income level, it is income change. Whether a household is worse off than a year ago matters about two and a half times more than any other answer, and it can be asked at intake in one sentence.</a:t>
+            </a:r>
+          </a:p>
+          <a:p>
+            <a:endParaRPr/>
+          </a:p>
+          <a:p>
+            <a:r>
+              <a:t>Grant households are more food insecure, not less: 37.6% against 20.6%. That is not evidence that grants cause harm. Grants are means-tested, so they mark households that were already poor, and one survey wave cannot separate targeting from effect.</a:t>
+            </a:r>
+          </a:p>
+          <a:p>
+            <a:endParaRPr/>
+          </a:p>
+          <a:p>
+            <a:r>
+              <a:t>The right-hand chart is the honest limitation. The screen finds 94% of at-risk households earning under R2,500 and only 39% above R11,500. It is weakest exactly where food insecurity is least expected, so a lower-risk result is not clearance, and self-referral stays open.</a:t>
             </a:r>
           </a:p>
         </p:txBody>
@@ -1309,7 +911,7 @@
             <a:spLocks noGrp="1"/>
           </p:cNvSpPr>
           <p:nvPr>
-            <p:ph type="sldNum" idx="5" sz="quarter"/>
+            <p:ph type="sldNum" sz="quarter" idx="5"/>
           </p:nvPr>
         </p:nvSpPr>
         <p:spPr/>
@@ -1323,7 +925,7 @@
 </file>
 
 <file path=ppt/notesSlides/notesSlide7.xml><?xml version="1.0" encoding="utf-8"?>
-<p:notes xmlns:a="http://schemas.openxmlformats.org/drawingml/2006/main" xmlns:p="http://schemas.openxmlformats.org/presentationml/2006/main" xmlns:r="http://schemas.openxmlformats.org/officeDocument/2006/relationships">
+<p:notes xmlns:a="http://schemas.openxmlformats.org/drawingml/2006/main" xmlns:r="http://schemas.openxmlformats.org/officeDocument/2006/relationships" xmlns:p="http://schemas.openxmlformats.org/presentationml/2006/main">
   <p:cSld>
     <p:spTree>
       <p:nvGrpSpPr>
@@ -1343,7 +945,7 @@
         <p:nvSpPr>
           <p:cNvPr id="2" name="Slide Image Placeholder 1"/>
           <p:cNvSpPr>
-            <a:spLocks noGrp="1"/>
+            <a:spLocks noGrp="1" noRot="1" noChangeAspect="1"/>
           </p:cNvSpPr>
           <p:nvPr>
             <p:ph type="sldImg" idx="2"/>
@@ -1358,7 +960,7 @@
             <a:spLocks noGrp="1"/>
           </p:cNvSpPr>
           <p:nvPr>
-            <p:ph type="body" idx="3" sz="quarter"/>
+            <p:ph type="body" sz="quarter" idx="3"/>
           </p:nvPr>
         </p:nvSpPr>
         <p:spPr/>
@@ -1367,7 +969,42 @@
           <a:lstStyle/>
           <a:p>
             <a:r>
-              <a:t>Our question was a targeting one: when the institute can only follow up a fraction of households, which ones should it visit first? 20,940 households in the survey, three in ten at risk. What we built is a screen that ranks them - not a test of who qualifies for anything. Alexander takes the problem, the data and the modelling; Rudi the results and the dashboard; Timothy the app, the recommendations and the limits.</a:t>
+              <a:t>Have the dashboard open before the talk starts.</a:t>
+            </a:r>
+          </a:p>
+          <a:p>
+            <a:r>
+              <a:t>1. Overview page: six decision questions, every page answers one of them.</a:t>
+            </a:r>
+          </a:p>
+          <a:p>
+            <a:r>
+              <a:t>2. 'How well the screen works': the four cards are the slide 5 numbers, live from the final dataset.</a:t>
+            </a:r>
+          </a:p>
+          <a:p>
+            <a:r>
+              <a:t>3. Set the threshold to 0.30: recall drops from 80.7% to 67.8% and referrals from 59% to 44%, about 150 fewer households per thousand to visit and roughly one in eight at-risk households newly missed. Put it back to 0.24.</a:t>
+            </a:r>
+          </a:p>
+          <a:p>
+            <a:r>
+              <a:t>4. 'Who the screen misses': click through income, grants and province. Income above R11,500 sits far outside the tolerance band, a documented limitation.</a:t>
+            </a:r>
+          </a:p>
+          <a:p>
+            <a:r>
+              <a:t>5. 'What drives risk': income change at the top, odds ratios with confidence intervals.</a:t>
+            </a:r>
+          </a:p>
+          <a:p>
+            <a:r>
+              <a:t>6. Hand over to Timothy for the Shiny app.</a:t>
+            </a:r>
+          </a:p>
+          <a:p>
+            <a:r>
+              <a:t>If the live demo fails, use this screenshot and slides 5 and 6, and keep going.</a:t>
             </a:r>
           </a:p>
         </p:txBody>
@@ -1379,7 +1016,7 @@
             <a:spLocks noGrp="1"/>
           </p:cNvSpPr>
           <p:nvPr>
-            <p:ph type="sldNum" idx="5" sz="quarter"/>
+            <p:ph type="sldNum" sz="quarter" idx="5"/>
           </p:nvPr>
         </p:nvSpPr>
         <p:spPr/>
@@ -1393,7 +1030,7 @@
 </file>
 
 <file path=ppt/notesSlides/notesSlide8.xml><?xml version="1.0" encoding="utf-8"?>
-<p:notes xmlns:a="http://schemas.openxmlformats.org/drawingml/2006/main" xmlns:p="http://schemas.openxmlformats.org/presentationml/2006/main" xmlns:r="http://schemas.openxmlformats.org/officeDocument/2006/relationships">
+<p:notes xmlns:a="http://schemas.openxmlformats.org/drawingml/2006/main" xmlns:r="http://schemas.openxmlformats.org/officeDocument/2006/relationships" xmlns:p="http://schemas.openxmlformats.org/presentationml/2006/main">
   <p:cSld>
     <p:spTree>
       <p:nvGrpSpPr>
@@ -1413,7 +1050,7 @@
         <p:nvSpPr>
           <p:cNvPr id="2" name="Slide Image Placeholder 1"/>
           <p:cNvSpPr>
-            <a:spLocks noGrp="1"/>
+            <a:spLocks noGrp="1" noRot="1" noChangeAspect="1"/>
           </p:cNvSpPr>
           <p:nvPr>
             <p:ph type="sldImg" idx="2"/>
@@ -1428,7 +1065,7 @@
             <a:spLocks noGrp="1"/>
           </p:cNvSpPr>
           <p:nvPr>
-            <p:ph type="body" idx="3" sz="quarter"/>
+            <p:ph type="body" sz="quarter" idx="3"/>
           </p:nvPr>
         </p:nvSpPr>
         <p:spPr/>
@@ -1437,7 +1074,96 @@
           <a:lstStyle/>
           <a:p>
             <a:r>
-              <a:t>Three goals from Milestone 1: rank the indicators, build an interpretable model without leakage, and give decision-makers self-service exploration. We followed CRISP-DM in order and went back three times when the evidence demanded it - the key repair, the duplicate-ID finding, and the move to a binary target. The dashed arrows on the diagram are those three returns.</a:t>
+              <a:t>Live demo, in this order:</a:t>
+            </a:r>
+          </a:p>
+          <a:p>
+            <a:endParaRPr/>
+          </a:p>
+          <a:p>
+            <a:r>
+              <a:t>1. One household. Type the rural example: income fell sharply, no electricity, six people,</a:t>
+            </a:r>
+          </a:p>
+          <a:p>
+            <a:r>
+              <a:t>   R1,200 a month, two grant recipients, pit latrine. Score it. Point at the three factors the app</a:t>
+            </a:r>
+          </a:p>
+          <a:p>
+            <a:r>
+              <a:t>   gives back, and at the words it uses - "Higher risk: refer for review", never "food insecure".</a:t>
+            </a:r>
+          </a:p>
+          <a:p>
+            <a:r>
+              <a:t>2. The contrast. Change income to R30,000 and settlement to urban, re-score, and let the</a:t>
+            </a:r>
+          </a:p>
+          <a:p>
+            <a:r>
+              <a:t>   probability drop. That is the whole model in one gesture.</a:t>
+            </a:r>
+          </a:p>
+          <a:p>
+            <a:r>
+              <a:t>3. The batch. Upload tests/messy_households.csv - 13 deliberately broken rows. Scroll the issues</a:t>
+            </a:r>
+          </a:p>
+          <a:p>
+            <a:r>
+              <a:t>   table: sentinel codes recoded, an impossible household size rejected, a duplicate identifier</a:t>
+            </a:r>
+          </a:p>
+          <a:p>
+            <a:r>
+              <a:t>   flagged, rows with too much missing left unscored rather than guessed.</a:t>
+            </a:r>
+          </a:p>
+          <a:p>
+            <a:r>
+              <a:t>4. The limits page. Land here, not on a score. Read the two lines about which households the</a:t>
+            </a:r>
+          </a:p>
+          <a:p>
+            <a:r>
+              <a:t>   screen misses.</a:t>
+            </a:r>
+          </a:p>
+          <a:p>
+            <a:endParaRPr/>
+          </a:p>
+          <a:p>
+            <a:r>
+              <a:t>This is the part a field officer actually touches. Seven questions, short enough to ask at a door,</a:t>
+            </a:r>
+          </a:p>
+          <a:p>
+            <a:r>
+              <a:t>and the answer comes back with the three things that drove it - so the officer can say why a</a:t>
+            </a:r>
+          </a:p>
+          <a:p>
+            <a:r>
+              <a:t>household was referred, and a supervisor can disagree with it.</a:t>
+            </a:r>
+          </a:p>
+          <a:p>
+            <a:endParaRPr/>
+          </a:p>
+          <a:p>
+            <a:r>
+              <a:t>Likely question - what happens if someone uploads real household IDs? They stay in the file and</a:t>
+            </a:r>
+          </a:p>
+          <a:p>
+            <a:r>
+              <a:t>never leave the machine. Uploads are processed in memory and not written to disk, identifiers are</a:t>
+            </a:r>
+          </a:p>
+          <a:p>
+            <a:r>
+              <a:t>never returned in the download, and the monitoring log keeps totals only.</a:t>
             </a:r>
           </a:p>
         </p:txBody>
@@ -1449,7 +1175,7 @@
             <a:spLocks noGrp="1"/>
           </p:cNvSpPr>
           <p:nvPr>
-            <p:ph type="sldNum" idx="5" sz="quarter"/>
+            <p:ph type="sldNum" sz="quarter" idx="5"/>
           </p:nvPr>
         </p:nvSpPr>
         <p:spPr/>
@@ -1463,7 +1189,7 @@
 </file>
 
 <file path=ppt/notesSlides/notesSlide9.xml><?xml version="1.0" encoding="utf-8"?>
-<p:notes xmlns:a="http://schemas.openxmlformats.org/drawingml/2006/main" xmlns:p="http://schemas.openxmlformats.org/presentationml/2006/main" xmlns:r="http://schemas.openxmlformats.org/officeDocument/2006/relationships">
+<p:notes xmlns:a="http://schemas.openxmlformats.org/drawingml/2006/main" xmlns:r="http://schemas.openxmlformats.org/officeDocument/2006/relationships" xmlns:p="http://schemas.openxmlformats.org/presentationml/2006/main">
   <p:cSld>
     <p:spTree>
       <p:nvGrpSpPr>
@@ -1483,7 +1209,7 @@
         <p:nvSpPr>
           <p:cNvPr id="2" name="Slide Image Placeholder 1"/>
           <p:cNvSpPr>
-            <a:spLocks noGrp="1"/>
+            <a:spLocks noGrp="1" noRot="1" noChangeAspect="1"/>
           </p:cNvSpPr>
           <p:nvPr>
             <p:ph type="sldImg" idx="2"/>
@@ -1498,7 +1224,7 @@
             <a:spLocks noGrp="1"/>
           </p:cNvSpPr>
           <p:nvPr>
-            <p:ph type="body" idx="3" sz="quarter"/>
+            <p:ph type="body" sz="quarter" idx="3"/>
           </p:nvPr>
         </p:nvSpPr>
         <p:spPr/>
@@ -1507,7 +1233,94 @@
           <a:lstStyle/>
           <a:p>
             <a:r>
-              <a:t>Seven of the eleven files are household-level and were kept. D01 to D03 are person-level and D11 is a different survey with no shared household IDs, so both were left out with reasons. The joins are guarded one-to-one joins that stop rather than drop a household: 15 placeholder keys in D05 were repaired, not discarded. Sixteen columns that define or proxy the target are excluded from the predictors, and the notebook fails if one appears.</a:t>
+              <a:t>Each of these starts from a number on Rudi's slides, and each has a limit attached, because the</a:t>
+            </a:r>
+          </a:p>
+          <a:p>
+            <a:r>
+              <a:t>limits are what make them safe to act on.</a:t>
+            </a:r>
+          </a:p>
+          <a:p>
+            <a:endParaRPr/>
+          </a:p>
+          <a:p>
+            <a:r>
+              <a:t>The first is a budget decision disguised as a technical one. At our threshold the tool refers about</a:t>
+            </a:r>
+          </a:p>
+          <a:p>
+            <a:r>
+              <a:t>three households in five, and about four in ten of those referrals turn out to be food secure. That</a:t>
+            </a:r>
+          </a:p>
+          <a:p>
+            <a:r>
+              <a:t>is the cost of finding four in five of the households that are at risk. Managers should size</a:t>
+            </a:r>
+          </a:p>
+          <a:p>
+            <a:r>
+              <a:t>follow-up capacity against that rate before go-live - or move the threshold knowingly, which the</a:t>
+            </a:r>
+          </a:p>
+          <a:p>
+            <a:r>
+              <a:t>dashboard lets them do, and accept that they will miss more people.</a:t>
+            </a:r>
+          </a:p>
+          <a:p>
+            <a:endParaRPr/>
+          </a:p>
+          <a:p>
+            <a:r>
+              <a:t>The second is the cheapest thing on this list. One question about whether income has fallen carries</a:t>
+            </a:r>
+          </a:p>
+          <a:p>
+            <a:r>
+              <a:t>more signal than anything else we measured, and it can be asked without the model at all.</a:t>
+            </a:r>
+          </a:p>
+          <a:p>
+            <a:endParaRPr/>
+          </a:p>
+          <a:p>
+            <a:r>
+              <a:t>The third needs the caution said out loud. Grant-receiving households are at higher risk because</a:t>
+            </a:r>
+          </a:p>
+          <a:p>
+            <a:r>
+              <a:t>grants are targeted at poor households. That is a reason to use the registers to find people</a:t>
+            </a:r>
+          </a:p>
+          <a:p>
+            <a:r>
+              <a:t>quickly. It is not evidence that grants cause food insecurity.</a:t>
+            </a:r>
+          </a:p>
+          <a:p>
+            <a:endParaRPr/>
+          </a:p>
+          <a:p>
+            <a:r>
+              <a:t>The last one is there because of what we found about ourselves. The screen is weakest for</a:t>
+            </a:r>
+          </a:p>
+          <a:p>
+            <a:r>
+              <a:t>households that do not look poor on our seven inputs. We chose not to patch that with a different</a:t>
+            </a:r>
+          </a:p>
+          <a:p>
+            <a:r>
+              <a:t>threshold for richer households, because that means treating people differently by income on the</a:t>
+            </a:r>
+          </a:p>
+          <a:p>
+            <a:r>
+              <a:t>basis of a proxy. We publish the gap instead, and ask for a monthly audit. Keep self-referral open.</a:t>
             </a:r>
           </a:p>
         </p:txBody>
@@ -1519,7 +1332,7 @@
             <a:spLocks noGrp="1"/>
           </p:cNvSpPr>
           <p:nvPr>
-            <p:ph type="sldNum" idx="5" sz="quarter"/>
+            <p:ph type="sldNum" sz="quarter" idx="5"/>
           </p:nvPr>
         </p:nvSpPr>
         <p:spPr/>
@@ -7293,7 +7106,7 @@
               <a:rPr lang="en-ZA" sz="3600" dirty="0">
                 <a:latin typeface="Aptos" panose="020B0004020202020204" pitchFamily="34" charset="0"/>
               </a:rPr>
-              <a:t>30.6%</a:t>
+              <a:t>28.3%</a:t>
             </a:r>
           </a:p>
           <a:p>
@@ -7411,7 +7224,7 @@
 </file>
 
 <file path=ppt/slides/slide10.xml><?xml version="1.0" encoding="utf-8"?>
-<p:sld xmlns:a="http://schemas.openxmlformats.org/drawingml/2006/main" xmlns:p="http://schemas.openxmlformats.org/presentationml/2006/main" xmlns:r="http://schemas.openxmlformats.org/officeDocument/2006/relationships">
+<p:sld xmlns:a="http://schemas.openxmlformats.org/drawingml/2006/main" xmlns:r="http://schemas.openxmlformats.org/officeDocument/2006/relationships" xmlns:p="http://schemas.openxmlformats.org/presentationml/2006/main">
   <p:cSld>
     <p:spTree>
       <p:nvGrpSpPr>
@@ -7419,7 +7232,14 @@
         <p:cNvGrpSpPr/>
         <p:nvPr/>
       </p:nvGrpSpPr>
-      <p:grpSpPr/>
+      <p:grpSpPr>
+        <a:xfrm>
+          <a:off x="0" y="0"/>
+          <a:ext cx="0" cy="0"/>
+          <a:chOff x="0" y="0"/>
+          <a:chExt cx="0" cy="0"/>
+        </a:xfrm>
+      </p:grpSpPr>
       <p:sp>
         <p:nvSpPr>
           <p:cNvPr id="2" name="Title 1"/>
@@ -7463,7 +7283,7 @@
           <a:noFill/>
         </p:spPr>
         <p:txBody>
-          <a:bodyPr wrap="square" lIns="0" rIns="0" tIns="0" bIns="0">
+          <a:bodyPr wrap="square" lIns="0" tIns="0" rIns="0" bIns="0">
             <a:spAutoFit/>
           </a:bodyPr>
           <a:lstStyle/>
@@ -7502,7 +7322,7 @@
           <a:noFill/>
         </p:spPr>
         <p:txBody>
-          <a:bodyPr wrap="square" lIns="0" rIns="0" tIns="0" bIns="0">
+          <a:bodyPr wrap="square" lIns="0" tIns="0" rIns="0" bIns="0">
             <a:spAutoFit/>
           </a:bodyPr>
           <a:lstStyle/>
@@ -7541,7 +7361,7 @@
           <a:noFill/>
         </p:spPr>
         <p:txBody>
-          <a:bodyPr wrap="square" lIns="0" rIns="0" tIns="0" bIns="0">
+          <a:bodyPr wrap="square" lIns="0" tIns="0" rIns="0" bIns="0">
             <a:spAutoFit/>
           </a:bodyPr>
           <a:lstStyle/>
@@ -7580,7 +7400,7 @@
           <a:noFill/>
         </p:spPr>
         <p:txBody>
-          <a:bodyPr wrap="square" lIns="0" rIns="0" tIns="0" bIns="0">
+          <a:bodyPr wrap="square" lIns="0" tIns="0" rIns="0" bIns="0">
             <a:spAutoFit/>
           </a:bodyPr>
           <a:lstStyle/>
@@ -7667,7 +7487,7 @@
           <a:noFill/>
         </p:spPr>
         <p:txBody>
-          <a:bodyPr wrap="square" lIns="0" rIns="0" tIns="0" bIns="0">
+          <a:bodyPr wrap="square" lIns="0" tIns="0" rIns="0" bIns="0">
             <a:spAutoFit/>
           </a:bodyPr>
           <a:lstStyle/>
@@ -7706,7 +7526,7 @@
           <a:noFill/>
         </p:spPr>
         <p:txBody>
-          <a:bodyPr wrap="square" lIns="0" rIns="0" tIns="0" bIns="0">
+          <a:bodyPr wrap="square" lIns="0" tIns="0" rIns="0" bIns="0">
             <a:spAutoFit/>
           </a:bodyPr>
           <a:lstStyle/>
@@ -7793,7 +7613,7 @@
           <a:noFill/>
         </p:spPr>
         <p:txBody>
-          <a:bodyPr wrap="square" lIns="0" rIns="0" tIns="0" bIns="0">
+          <a:bodyPr wrap="square" lIns="0" tIns="0" rIns="0" bIns="0">
             <a:spAutoFit/>
           </a:bodyPr>
           <a:lstStyle/>
@@ -8140,7 +7960,7 @@
           <p:nvPr/>
         </p:nvPicPr>
         <p:blipFill>
-          <a:blip r:embed="rId2">
+          <a:blip r:embed="rId3">
             <a:extLst>
               <a:ext uri="{28A0092B-C50C-407E-A947-70E740481C1C}">
                 <a14:useLocalDpi xmlns:a14="http://schemas.microsoft.com/office/drawing/2010/main" val="0"/>
@@ -8313,7 +8133,7 @@
           <p:nvPr/>
         </p:nvPicPr>
         <p:blipFill>
-          <a:blip r:embed="rId2">
+          <a:blip r:embed="rId3">
             <a:extLst>
               <a:ext uri="{28A0092B-C50C-407E-A947-70E740481C1C}">
                 <a14:useLocalDpi xmlns:a14="http://schemas.microsoft.com/office/drawing/2010/main" val="0"/>
@@ -8621,7 +8441,7 @@
           <p:nvPr/>
         </p:nvPicPr>
         <p:blipFill>
-          <a:blip r:embed="rId2">
+          <a:blip r:embed="rId3">
             <a:extLst>
               <a:ext uri="{28A0092B-C50C-407E-A947-70E740481C1C}">
                 <a14:useLocalDpi xmlns:a14="http://schemas.microsoft.com/office/drawing/2010/main" val="0"/>
@@ -9435,9 +9255,6 @@
               </a:rPr>
               <a:t>58.3% of households whose income fell sharply are food insecure, against 18-21% mid-scale.</a:t>
             </a:r>
-            <a:endParaRPr lang="en-ZA" sz="1000" dirty="0">
-              <a:latin typeface="Aptos" panose="020B0004020202020204" pitchFamily="34" charset="0"/>
-            </a:endParaRPr>
           </a:p>
         </p:txBody>
       </p:sp>
@@ -9735,9 +9552,6 @@
               </a:rPr>
               <a:t>Live in Power BI, then over to Timothy for the Shiny app.</a:t>
             </a:r>
-            <a:endParaRPr lang="en-ZA" sz="1000" dirty="0">
-              <a:latin typeface="Aptos" panose="020B0004020202020204" pitchFamily="34" charset="0"/>
-            </a:endParaRPr>
           </a:p>
         </p:txBody>
       </p:sp>
@@ -9779,7 +9593,7 @@
 </file>
 
 <file path=ppt/slides/slide8.xml><?xml version="1.0" encoding="utf-8"?>
-<p:sld xmlns:a="http://schemas.openxmlformats.org/drawingml/2006/main" xmlns:p="http://schemas.openxmlformats.org/presentationml/2006/main" xmlns:r="http://schemas.openxmlformats.org/officeDocument/2006/relationships">
+<p:sld xmlns:a="http://schemas.openxmlformats.org/drawingml/2006/main" xmlns:r="http://schemas.openxmlformats.org/officeDocument/2006/relationships" xmlns:p="http://schemas.openxmlformats.org/presentationml/2006/main">
   <p:cSld>
     <p:spTree>
       <p:nvGrpSpPr>
@@ -9787,7 +9601,14 @@
         <p:cNvGrpSpPr/>
         <p:nvPr/>
       </p:nvGrpSpPr>
-      <p:grpSpPr/>
+      <p:grpSpPr>
+        <a:xfrm>
+          <a:off x="0" y="0"/>
+          <a:ext cx="0" cy="0"/>
+          <a:chOff x="0" y="0"/>
+          <a:chExt cx="0" cy="0"/>
+        </a:xfrm>
+      </p:grpSpPr>
       <p:sp>
         <p:nvSpPr>
           <p:cNvPr id="2" name="Title 1"/>
@@ -9831,7 +9652,7 @@
           <a:noFill/>
         </p:spPr>
         <p:txBody>
-          <a:bodyPr wrap="square" lIns="0" rIns="0" tIns="0" bIns="0">
+          <a:bodyPr wrap="square" lIns="0" tIns="0" rIns="0" bIns="0">
             <a:spAutoFit/>
           </a:bodyPr>
           <a:lstStyle/>
@@ -9870,7 +9691,7 @@
           <a:noFill/>
         </p:spPr>
         <p:txBody>
-          <a:bodyPr wrap="square" lIns="0" rIns="0" tIns="0" bIns="0">
+          <a:bodyPr wrap="square" lIns="0" tIns="0" rIns="0" bIns="0">
             <a:spAutoFit/>
           </a:bodyPr>
           <a:lstStyle/>
@@ -9895,69 +9716,6 @@
       <p:pic>
         <p:nvPicPr>
           <p:cNvPr id="5" name="Picture 4" descr="app_1_single_household.png"/>
-          <p:cNvPicPr>
-            <a:picLocks noChangeAspect="1"/>
-          </p:cNvPicPr>
-          <p:nvPr/>
-        </p:nvPicPr>
-        <p:blipFill>
-          <a:blip r:embed="rId2"/>
-          <a:stretch>
-            <a:fillRect/>
-          </a:stretch>
-        </p:blipFill>
-        <p:spPr>
-          <a:xfrm>
-            <a:off x="1143000" y="2103120"/>
-            <a:ext cx="3154680" cy="2309428"/>
-          </a:xfrm>
-          <a:prstGeom prst="rect">
-            <a:avLst/>
-          </a:prstGeom>
-        </p:spPr>
-      </p:pic>
-      <p:sp>
-        <p:nvSpPr>
-          <p:cNvPr id="6" name="TextBox 5"/>
-          <p:cNvSpPr txBox="1"/>
-          <p:nvPr/>
-        </p:nvSpPr>
-        <p:spPr>
-          <a:xfrm>
-            <a:off x="1143000" y="4956048"/>
-            <a:ext cx="3154680" cy="274320"/>
-          </a:xfrm>
-          <a:prstGeom prst="rect">
-            <a:avLst/>
-          </a:prstGeom>
-          <a:noFill/>
-        </p:spPr>
-        <p:txBody>
-          <a:bodyPr wrap="square" lIns="0" rIns="0" tIns="0" bIns="0">
-            <a:spAutoFit/>
-          </a:bodyPr>
-          <a:lstStyle/>
-          <a:p>
-            <a:pPr algn="ctr">
-              <a:spcAft>
-                <a:spcPts val="600"/>
-              </a:spcAft>
-            </a:pPr>
-            <a:r>
-              <a:rPr sz="1100" b="1" i="0">
-                <a:solidFill>
-                  <a:srgbClr val="FFFFFF"/>
-                </a:solidFill>
-                <a:latin typeface="Aptos"/>
-              </a:rPr>
-              <a:t>One household, scored</a:t>
-            </a:r>
-          </a:p>
-        </p:txBody>
-      </p:sp>
-      <p:pic>
-        <p:nvPicPr>
-          <p:cNvPr id="7" name="Picture 6" descr="app_2_batch_upload.png"/>
           <p:cNvPicPr>
             <a:picLocks noChangeAspect="1"/>
           </p:cNvPicPr>
@@ -9971,8 +9729,8 @@
         </p:blipFill>
         <p:spPr>
           <a:xfrm>
-            <a:off x="4845406" y="2103120"/>
-            <a:ext cx="2498140" cy="2743200"/>
+            <a:off x="1143000" y="2103120"/>
+            <a:ext cx="3154680" cy="2309428"/>
           </a:xfrm>
           <a:prstGeom prst="rect">
             <a:avLst/>
@@ -9981,13 +9739,13 @@
       </p:pic>
       <p:sp>
         <p:nvSpPr>
-          <p:cNvPr id="8" name="TextBox 7"/>
+          <p:cNvPr id="6" name="TextBox 5"/>
           <p:cNvSpPr txBox="1"/>
           <p:nvPr/>
         </p:nvSpPr>
         <p:spPr>
           <a:xfrm>
-            <a:off x="4517136" y="4956048"/>
+            <a:off x="1143000" y="4956048"/>
             <a:ext cx="3154680" cy="274320"/>
           </a:xfrm>
           <a:prstGeom prst="rect">
@@ -9996,7 +9754,7 @@
           <a:noFill/>
         </p:spPr>
         <p:txBody>
-          <a:bodyPr wrap="square" lIns="0" rIns="0" tIns="0" bIns="0">
+          <a:bodyPr wrap="square" lIns="0" tIns="0" rIns="0" bIns="0">
             <a:spAutoFit/>
           </a:bodyPr>
           <a:lstStyle/>
@@ -10013,14 +9771,14 @@
                 </a:solidFill>
                 <a:latin typeface="Aptos"/>
               </a:rPr>
-              <a:t>A batch, with the issues it refused</a:t>
+              <a:t>One household, scored</a:t>
             </a:r>
           </a:p>
         </p:txBody>
       </p:sp>
       <p:pic>
         <p:nvPicPr>
-          <p:cNvPr id="9" name="Picture 8" descr="app_3_about_and_limits.png"/>
+          <p:cNvPr id="7" name="Picture 6" descr="app_2_batch_upload.png"/>
           <p:cNvPicPr>
             <a:picLocks noChangeAspect="1"/>
           </p:cNvPicPr>
@@ -10034,8 +9792,8 @@
         </p:blipFill>
         <p:spPr>
           <a:xfrm>
-            <a:off x="7891272" y="2103120"/>
-            <a:ext cx="3154680" cy="2078486"/>
+            <a:off x="4845406" y="2103120"/>
+            <a:ext cx="2498140" cy="2743200"/>
           </a:xfrm>
           <a:prstGeom prst="rect">
             <a:avLst/>
@@ -10044,13 +9802,13 @@
       </p:pic>
       <p:sp>
         <p:nvSpPr>
-          <p:cNvPr id="10" name="TextBox 9"/>
+          <p:cNvPr id="8" name="TextBox 7"/>
           <p:cNvSpPr txBox="1"/>
           <p:nvPr/>
         </p:nvSpPr>
         <p:spPr>
           <a:xfrm>
-            <a:off x="7891272" y="4956048"/>
+            <a:off x="4517136" y="4956048"/>
             <a:ext cx="3154680" cy="274320"/>
           </a:xfrm>
           <a:prstGeom prst="rect">
@@ -10059,7 +9817,70 @@
           <a:noFill/>
         </p:spPr>
         <p:txBody>
-          <a:bodyPr wrap="square" lIns="0" rIns="0" tIns="0" bIns="0">
+          <a:bodyPr wrap="square" lIns="0" tIns="0" rIns="0" bIns="0">
+            <a:spAutoFit/>
+          </a:bodyPr>
+          <a:lstStyle/>
+          <a:p>
+            <a:pPr algn="ctr">
+              <a:spcAft>
+                <a:spcPts val="600"/>
+              </a:spcAft>
+            </a:pPr>
+            <a:r>
+              <a:rPr sz="1100" b="1" i="0">
+                <a:solidFill>
+                  <a:srgbClr val="FFFFFF"/>
+                </a:solidFill>
+                <a:latin typeface="Aptos"/>
+              </a:rPr>
+              <a:t>A batch, with the issues it refused</a:t>
+            </a:r>
+          </a:p>
+        </p:txBody>
+      </p:sp>
+      <p:pic>
+        <p:nvPicPr>
+          <p:cNvPr id="9" name="Picture 8" descr="app_3_about_and_limits.png"/>
+          <p:cNvPicPr>
+            <a:picLocks noChangeAspect="1"/>
+          </p:cNvPicPr>
+          <p:nvPr/>
+        </p:nvPicPr>
+        <p:blipFill>
+          <a:blip r:embed="rId5"/>
+          <a:stretch>
+            <a:fillRect/>
+          </a:stretch>
+        </p:blipFill>
+        <p:spPr>
+          <a:xfrm>
+            <a:off x="7891272" y="2103120"/>
+            <a:ext cx="3154680" cy="2078486"/>
+          </a:xfrm>
+          <a:prstGeom prst="rect">
+            <a:avLst/>
+          </a:prstGeom>
+        </p:spPr>
+      </p:pic>
+      <p:sp>
+        <p:nvSpPr>
+          <p:cNvPr id="10" name="TextBox 9"/>
+          <p:cNvSpPr txBox="1"/>
+          <p:nvPr/>
+        </p:nvSpPr>
+        <p:spPr>
+          <a:xfrm>
+            <a:off x="7891272" y="4956048"/>
+            <a:ext cx="3154680" cy="274320"/>
+          </a:xfrm>
+          <a:prstGeom prst="rect">
+            <a:avLst/>
+          </a:prstGeom>
+          <a:noFill/>
+        </p:spPr>
+        <p:txBody>
+          <a:bodyPr wrap="square" lIns="0" tIns="0" rIns="0" bIns="0">
             <a:spAutoFit/>
           </a:bodyPr>
           <a:lstStyle/>
@@ -10098,7 +9919,7 @@
           <a:noFill/>
         </p:spPr>
         <p:txBody>
-          <a:bodyPr wrap="square" lIns="0" rIns="0" tIns="0" bIns="0">
+          <a:bodyPr wrap="square" lIns="0" tIns="0" rIns="0" bIns="0">
             <a:spAutoFit/>
           </a:bodyPr>
           <a:lstStyle/>
@@ -10129,7 +9950,7 @@
 </file>
 
 <file path=ppt/slides/slide9.xml><?xml version="1.0" encoding="utf-8"?>
-<p:sld xmlns:a="http://schemas.openxmlformats.org/drawingml/2006/main" xmlns:p="http://schemas.openxmlformats.org/presentationml/2006/main" xmlns:r="http://schemas.openxmlformats.org/officeDocument/2006/relationships">
+<p:sld xmlns:a="http://schemas.openxmlformats.org/drawingml/2006/main" xmlns:r="http://schemas.openxmlformats.org/officeDocument/2006/relationships" xmlns:p="http://schemas.openxmlformats.org/presentationml/2006/main">
   <p:cSld>
     <p:spTree>
       <p:nvGrpSpPr>
@@ -10137,7 +9958,14 @@
         <p:cNvGrpSpPr/>
         <p:nvPr/>
       </p:nvGrpSpPr>
-      <p:grpSpPr/>
+      <p:grpSpPr>
+        <a:xfrm>
+          <a:off x="0" y="0"/>
+          <a:ext cx="0" cy="0"/>
+          <a:chOff x="0" y="0"/>
+          <a:chExt cx="0" cy="0"/>
+        </a:xfrm>
+      </p:grpSpPr>
       <p:sp>
         <p:nvSpPr>
           <p:cNvPr id="2" name="Title 1"/>
@@ -10181,7 +10009,7 @@
           <a:noFill/>
         </p:spPr>
         <p:txBody>
-          <a:bodyPr wrap="square" lIns="0" rIns="0" tIns="0" bIns="0">
+          <a:bodyPr wrap="square" lIns="0" tIns="0" rIns="0" bIns="0">
             <a:spAutoFit/>
           </a:bodyPr>
           <a:lstStyle/>
@@ -10222,9 +10050,27 @@
                 <a:tableStyleId>{5C22544A-7EE6-4342-B048-85BDC9FD1C3A}</a:tableStyleId>
               </a:tblPr>
               <a:tblGrid>
-                <a:gridCol w="3291840"/>
-                <a:gridCol w="4389120"/>
-                <a:gridCol w="2221992"/>
+                <a:gridCol w="3291840">
+                  <a:extLst>
+                    <a:ext uri="{9D8B030D-6E8A-4147-A177-3AD203B41FA5}">
+                      <a16:colId xmlns:a16="http://schemas.microsoft.com/office/drawing/2014/main" val="20000"/>
+                    </a:ext>
+                  </a:extLst>
+                </a:gridCol>
+                <a:gridCol w="4389120">
+                  <a:extLst>
+                    <a:ext uri="{9D8B030D-6E8A-4147-A177-3AD203B41FA5}">
+                      <a16:colId xmlns:a16="http://schemas.microsoft.com/office/drawing/2014/main" val="20001"/>
+                    </a:ext>
+                  </a:extLst>
+                </a:gridCol>
+                <a:gridCol w="2221992">
+                  <a:extLst>
+                    <a:ext uri="{9D8B030D-6E8A-4147-A177-3AD203B41FA5}">
+                      <a16:colId xmlns:a16="http://schemas.microsoft.com/office/drawing/2014/main" val="20002"/>
+                    </a:ext>
+                  </a:extLst>
+                </a:gridCol>
               </a:tblGrid>
               <a:tr h="585216">
                 <a:tc>
@@ -10243,7 +10089,7 @@
                       </a:r>
                     </a:p>
                   </a:txBody>
-                  <a:tcPr anchor="ctr" marL="73152" marR="73152" marT="27432" marB="27432">
+                  <a:tcPr marL="73152" marR="73152" marT="27432" marB="27432" anchor="ctr">
                     <a:solidFill>
                       <a:srgbClr val="EBEBEB"/>
                     </a:solidFill>
@@ -10265,7 +10111,7 @@
                       </a:r>
                     </a:p>
                   </a:txBody>
-                  <a:tcPr anchor="ctr" marL="73152" marR="73152" marT="27432" marB="27432">
+                  <a:tcPr marL="73152" marR="73152" marT="27432" marB="27432" anchor="ctr">
                     <a:solidFill>
                       <a:srgbClr val="EBEBEB"/>
                     </a:solidFill>
@@ -10287,12 +10133,17 @@
                       </a:r>
                     </a:p>
                   </a:txBody>
-                  <a:tcPr anchor="ctr" marL="73152" marR="73152" marT="27432" marB="27432">
+                  <a:tcPr marL="73152" marR="73152" marT="27432" marB="27432" anchor="ctr">
                     <a:solidFill>
                       <a:srgbClr val="EBEBEB"/>
                     </a:solidFill>
                   </a:tcPr>
                 </a:tc>
+                <a:extLst>
+                  <a:ext uri="{0D108BD9-81ED-4DB2-BD59-A6C34878D82A}">
+                    <a16:rowId xmlns:a16="http://schemas.microsoft.com/office/drawing/2014/main" val="10000"/>
+                  </a:ext>
+                </a:extLst>
               </a:tr>
               <a:tr h="585216">
                 <a:tc>
@@ -10311,7 +10162,7 @@
                       </a:r>
                     </a:p>
                   </a:txBody>
-                  <a:tcPr anchor="ctr" marL="73152" marR="73152" marT="27432" marB="27432">
+                  <a:tcPr marL="73152" marR="73152" marT="27432" marB="27432" anchor="ctr">
                     <a:solidFill>
                       <a:srgbClr val="FFFFFF"/>
                     </a:solidFill>
@@ -10333,7 +10184,7 @@
                       </a:r>
                     </a:p>
                   </a:txBody>
-                  <a:tcPr anchor="ctr" marL="73152" marR="73152" marT="27432" marB="27432">
+                  <a:tcPr marL="73152" marR="73152" marT="27432" marB="27432" anchor="ctr">
                     <a:solidFill>
                       <a:srgbClr val="FFFFFF"/>
                     </a:solidFill>
@@ -10355,12 +10206,17 @@
                       </a:r>
                     </a:p>
                   </a:txBody>
-                  <a:tcPr anchor="ctr" marL="73152" marR="73152" marT="27432" marB="27432">
+                  <a:tcPr marL="73152" marR="73152" marT="27432" marB="27432" anchor="ctr">
                     <a:solidFill>
                       <a:srgbClr val="FFFFFF"/>
                     </a:solidFill>
                   </a:tcPr>
                 </a:tc>
+                <a:extLst>
+                  <a:ext uri="{0D108BD9-81ED-4DB2-BD59-A6C34878D82A}">
+                    <a16:rowId xmlns:a16="http://schemas.microsoft.com/office/drawing/2014/main" val="10001"/>
+                  </a:ext>
+                </a:extLst>
               </a:tr>
               <a:tr h="585216">
                 <a:tc>
@@ -10379,7 +10235,7 @@
                       </a:r>
                     </a:p>
                   </a:txBody>
-                  <a:tcPr anchor="ctr" marL="73152" marR="73152" marT="27432" marB="27432">
+                  <a:tcPr marL="73152" marR="73152" marT="27432" marB="27432" anchor="ctr">
                     <a:solidFill>
                       <a:srgbClr val="FFFFFF"/>
                     </a:solidFill>
@@ -10401,7 +10257,7 @@
                       </a:r>
                     </a:p>
                   </a:txBody>
-                  <a:tcPr anchor="ctr" marL="73152" marR="73152" marT="27432" marB="27432">
+                  <a:tcPr marL="73152" marR="73152" marT="27432" marB="27432" anchor="ctr">
                     <a:solidFill>
                       <a:srgbClr val="FFFFFF"/>
                     </a:solidFill>
@@ -10423,12 +10279,17 @@
                       </a:r>
                     </a:p>
                   </a:txBody>
-                  <a:tcPr anchor="ctr" marL="73152" marR="73152" marT="27432" marB="27432">
+                  <a:tcPr marL="73152" marR="73152" marT="27432" marB="27432" anchor="ctr">
                     <a:solidFill>
                       <a:srgbClr val="FFFFFF"/>
                     </a:solidFill>
                   </a:tcPr>
                 </a:tc>
+                <a:extLst>
+                  <a:ext uri="{0D108BD9-81ED-4DB2-BD59-A6C34878D82A}">
+                    <a16:rowId xmlns:a16="http://schemas.microsoft.com/office/drawing/2014/main" val="10002"/>
+                  </a:ext>
+                </a:extLst>
               </a:tr>
               <a:tr h="585216">
                 <a:tc>
@@ -10447,7 +10308,7 @@
                       </a:r>
                     </a:p>
                   </a:txBody>
-                  <a:tcPr anchor="ctr" marL="73152" marR="73152" marT="27432" marB="27432">
+                  <a:tcPr marL="73152" marR="73152" marT="27432" marB="27432" anchor="ctr">
                     <a:solidFill>
                       <a:srgbClr val="FFFFFF"/>
                     </a:solidFill>
@@ -10469,7 +10330,7 @@
                       </a:r>
                     </a:p>
                   </a:txBody>
-                  <a:tcPr anchor="ctr" marL="73152" marR="73152" marT="27432" marB="27432">
+                  <a:tcPr marL="73152" marR="73152" marT="27432" marB="27432" anchor="ctr">
                     <a:solidFill>
                       <a:srgbClr val="FFFFFF"/>
                     </a:solidFill>
@@ -10491,12 +10352,17 @@
                       </a:r>
                     </a:p>
                   </a:txBody>
-                  <a:tcPr anchor="ctr" marL="73152" marR="73152" marT="27432" marB="27432">
+                  <a:tcPr marL="73152" marR="73152" marT="27432" marB="27432" anchor="ctr">
                     <a:solidFill>
                       <a:srgbClr val="FFFFFF"/>
                     </a:solidFill>
                   </a:tcPr>
                 </a:tc>
+                <a:extLst>
+                  <a:ext uri="{0D108BD9-81ED-4DB2-BD59-A6C34878D82A}">
+                    <a16:rowId xmlns:a16="http://schemas.microsoft.com/office/drawing/2014/main" val="10003"/>
+                  </a:ext>
+                </a:extLst>
               </a:tr>
               <a:tr h="585216">
                 <a:tc>
@@ -10515,7 +10381,7 @@
                       </a:r>
                     </a:p>
                   </a:txBody>
-                  <a:tcPr anchor="ctr" marL="73152" marR="73152" marT="27432" marB="27432">
+                  <a:tcPr marL="73152" marR="73152" marT="27432" marB="27432" anchor="ctr">
                     <a:solidFill>
                       <a:srgbClr val="FFFFFF"/>
                     </a:solidFill>
@@ -10537,7 +10403,7 @@
                       </a:r>
                     </a:p>
                   </a:txBody>
-                  <a:tcPr anchor="ctr" marL="73152" marR="73152" marT="27432" marB="27432">
+                  <a:tcPr marL="73152" marR="73152" marT="27432" marB="27432" anchor="ctr">
                     <a:solidFill>
                       <a:srgbClr val="FFFFFF"/>
                     </a:solidFill>
@@ -10559,12 +10425,17 @@
                       </a:r>
                     </a:p>
                   </a:txBody>
-                  <a:tcPr anchor="ctr" marL="73152" marR="73152" marT="27432" marB="27432">
+                  <a:tcPr marL="73152" marR="73152" marT="27432" marB="27432" anchor="ctr">
                     <a:solidFill>
                       <a:srgbClr val="FFFFFF"/>
                     </a:solidFill>
                   </a:tcPr>
                 </a:tc>
+                <a:extLst>
+                  <a:ext uri="{0D108BD9-81ED-4DB2-BD59-A6C34878D82A}">
+                    <a16:rowId xmlns:a16="http://schemas.microsoft.com/office/drawing/2014/main" val="10004"/>
+                  </a:ext>
+                </a:extLst>
               </a:tr>
               <a:tr h="585216">
                 <a:tc>
@@ -10583,7 +10454,7 @@
                       </a:r>
                     </a:p>
                   </a:txBody>
-                  <a:tcPr anchor="ctr" marL="73152" marR="73152" marT="27432" marB="27432">
+                  <a:tcPr marL="73152" marR="73152" marT="27432" marB="27432" anchor="ctr">
                     <a:solidFill>
                       <a:srgbClr val="FFFFFF"/>
                     </a:solidFill>
@@ -10605,7 +10476,7 @@
                       </a:r>
                     </a:p>
                   </a:txBody>
-                  <a:tcPr anchor="ctr" marL="73152" marR="73152" marT="27432" marB="27432">
+                  <a:tcPr marL="73152" marR="73152" marT="27432" marB="27432" anchor="ctr">
                     <a:solidFill>
                       <a:srgbClr val="FFFFFF"/>
                     </a:solidFill>
@@ -10627,12 +10498,17 @@
                       </a:r>
                     </a:p>
                   </a:txBody>
-                  <a:tcPr anchor="ctr" marL="73152" marR="73152" marT="27432" marB="27432">
+                  <a:tcPr marL="73152" marR="73152" marT="27432" marB="27432" anchor="ctr">
                     <a:solidFill>
                       <a:srgbClr val="FFFFFF"/>
                     </a:solidFill>
                   </a:tcPr>
                 </a:tc>
+                <a:extLst>
+                  <a:ext uri="{0D108BD9-81ED-4DB2-BD59-A6C34878D82A}">
+                    <a16:rowId xmlns:a16="http://schemas.microsoft.com/office/drawing/2014/main" val="10005"/>
+                  </a:ext>
+                </a:extLst>
               </a:tr>
             </a:tbl>
           </a:graphicData>
@@ -10655,7 +10531,7 @@
           <a:noFill/>
         </p:spPr>
         <p:txBody>
-          <a:bodyPr wrap="square" lIns="0" rIns="0" tIns="0" bIns="0">
+          <a:bodyPr wrap="square" lIns="0" tIns="0" rIns="0" bIns="0">
             <a:spAutoFit/>
           </a:bodyPr>
           <a:lstStyle/>
@@ -10952,44 +10828,44 @@
         <a:sysClr val="window" lastClr="FFFFFF"/>
       </a:lt1>
       <a:dk2>
-        <a:srgbClr val="1F497D"/>
+        <a:srgbClr val="0E2841"/>
       </a:dk2>
       <a:lt2>
-        <a:srgbClr val="EEECE1"/>
+        <a:srgbClr val="E8E8E8"/>
       </a:lt2>
       <a:accent1>
-        <a:srgbClr val="4F81BD"/>
+        <a:srgbClr val="156082"/>
       </a:accent1>
       <a:accent2>
-        <a:srgbClr val="C0504D"/>
+        <a:srgbClr val="E97132"/>
       </a:accent2>
       <a:accent3>
-        <a:srgbClr val="9BBB59"/>
+        <a:srgbClr val="196B24"/>
       </a:accent3>
       <a:accent4>
-        <a:srgbClr val="8064A2"/>
+        <a:srgbClr val="0F9ED5"/>
       </a:accent4>
       <a:accent5>
-        <a:srgbClr val="4BACC6"/>
+        <a:srgbClr val="A02B93"/>
       </a:accent5>
       <a:accent6>
-        <a:srgbClr val="F79646"/>
+        <a:srgbClr val="4EA72E"/>
       </a:accent6>
       <a:hlink>
-        <a:srgbClr val="0000FF"/>
+        <a:srgbClr val="467886"/>
       </a:hlink>
       <a:folHlink>
-        <a:srgbClr val="800080"/>
+        <a:srgbClr val="96607D"/>
       </a:folHlink>
     </a:clrScheme>
     <a:fontScheme name="Office">
       <a:majorFont>
-        <a:latin typeface="Calibri"/>
+        <a:latin typeface="Aptos Display" panose="02110004020202020204"/>
         <a:ea typeface=""/>
         <a:cs typeface=""/>
-        <a:font script="Jpan" typeface="ＭＳ Ｐゴシック"/>
+        <a:font script="Jpan" typeface="游ゴシック Light"/>
         <a:font script="Hang" typeface="맑은 고딕"/>
-        <a:font script="Hans" typeface="宋体"/>
+        <a:font script="Hans" typeface="等线 Light"/>
         <a:font script="Hant" typeface="新細明體"/>
         <a:font script="Arab" typeface="Times New Roman"/>
         <a:font script="Hebr" typeface="Times New Roman"/>
@@ -11017,14 +10893,31 @@
         <a:font script="Viet" typeface="Times New Roman"/>
         <a:font script="Uigh" typeface="Microsoft Uighur"/>
         <a:font script="Geor" typeface="Sylfaen"/>
+        <a:font script="Armn" typeface="Arial"/>
+        <a:font script="Bugi" typeface="Leelawadee UI"/>
+        <a:font script="Bopo" typeface="Microsoft JhengHei"/>
+        <a:font script="Java" typeface="Javanese Text"/>
+        <a:font script="Lisu" typeface="Segoe UI"/>
+        <a:font script="Mymr" typeface="Myanmar Text"/>
+        <a:font script="Nkoo" typeface="Ebrima"/>
+        <a:font script="Olck" typeface="Nirmala UI"/>
+        <a:font script="Osma" typeface="Ebrima"/>
+        <a:font script="Phag" typeface="Phagspa"/>
+        <a:font script="Syrn" typeface="Estrangelo Edessa"/>
+        <a:font script="Syrj" typeface="Estrangelo Edessa"/>
+        <a:font script="Syre" typeface="Estrangelo Edessa"/>
+        <a:font script="Sora" typeface="Nirmala UI"/>
+        <a:font script="Tale" typeface="Microsoft Tai Le"/>
+        <a:font script="Talu" typeface="Microsoft New Tai Lue"/>
+        <a:font script="Tfng" typeface="Ebrima"/>
       </a:majorFont>
       <a:minorFont>
-        <a:latin typeface="Calibri"/>
+        <a:latin typeface="Aptos" panose="02110004020202020204"/>
         <a:ea typeface=""/>
         <a:cs typeface=""/>
-        <a:font script="Jpan" typeface="ＭＳ Ｐゴシック"/>
+        <a:font script="Jpan" typeface="游ゴシック"/>
         <a:font script="Hang" typeface="맑은 고딕"/>
-        <a:font script="Hans" typeface="宋体"/>
+        <a:font script="Hans" typeface="等线"/>
         <a:font script="Hant" typeface="新細明體"/>
         <a:font script="Arab" typeface="Arial"/>
         <a:font script="Hebr" typeface="Arial"/>
@@ -11052,6 +10945,23 @@
         <a:font script="Viet" typeface="Arial"/>
         <a:font script="Uigh" typeface="Microsoft Uighur"/>
         <a:font script="Geor" typeface="Sylfaen"/>
+        <a:font script="Armn" typeface="Arial"/>
+        <a:font script="Bugi" typeface="Leelawadee UI"/>
+        <a:font script="Bopo" typeface="Microsoft JhengHei"/>
+        <a:font script="Java" typeface="Javanese Text"/>
+        <a:font script="Lisu" typeface="Segoe UI"/>
+        <a:font script="Mymr" typeface="Myanmar Text"/>
+        <a:font script="Nkoo" typeface="Ebrima"/>
+        <a:font script="Olck" typeface="Nirmala UI"/>
+        <a:font script="Osma" typeface="Ebrima"/>
+        <a:font script="Phag" typeface="Phagspa"/>
+        <a:font script="Syrn" typeface="Estrangelo Edessa"/>
+        <a:font script="Syrj" typeface="Estrangelo Edessa"/>
+        <a:font script="Syre" typeface="Estrangelo Edessa"/>
+        <a:font script="Sora" typeface="Nirmala UI"/>
+        <a:font script="Tale" typeface="Microsoft Tai Le"/>
+        <a:font script="Talu" typeface="Microsoft New Tai Lue"/>
+        <a:font script="Tfng" typeface="Ebrima"/>
       </a:minorFont>
     </a:fontScheme>
     <a:fmtScheme name="Office">
@@ -11063,180 +10973,136 @@
           <a:gsLst>
             <a:gs pos="0">
               <a:schemeClr val="phClr">
-                <a:tint val="50000"/>
-                <a:satMod val="300000"/>
+                <a:lumMod val="110000"/>
+                <a:satMod val="105000"/>
+                <a:tint val="67000"/>
               </a:schemeClr>
             </a:gs>
-            <a:gs pos="35000">
+            <a:gs pos="50000">
               <a:schemeClr val="phClr">
-                <a:tint val="37000"/>
-                <a:satMod val="300000"/>
+                <a:lumMod val="105000"/>
+                <a:satMod val="103000"/>
+                <a:tint val="73000"/>
               </a:schemeClr>
             </a:gs>
             <a:gs pos="100000">
               <a:schemeClr val="phClr">
-                <a:tint val="15000"/>
-                <a:satMod val="350000"/>
+                <a:lumMod val="105000"/>
+                <a:satMod val="109000"/>
+                <a:tint val="81000"/>
               </a:schemeClr>
             </a:gs>
           </a:gsLst>
-          <a:lin ang="16200000" scaled="1"/>
+          <a:lin ang="5400000" scaled="0"/>
         </a:gradFill>
         <a:gradFill rotWithShape="1">
           <a:gsLst>
             <a:gs pos="0">
               <a:schemeClr val="phClr">
-                <a:tint val="100000"/>
+                <a:satMod val="103000"/>
+                <a:lumMod val="102000"/>
+                <a:tint val="94000"/>
+              </a:schemeClr>
+            </a:gs>
+            <a:gs pos="50000">
+              <a:schemeClr val="phClr">
+                <a:satMod val="110000"/>
+                <a:lumMod val="100000"/>
                 <a:shade val="100000"/>
-                <a:satMod val="130000"/>
               </a:schemeClr>
             </a:gs>
             <a:gs pos="100000">
               <a:schemeClr val="phClr">
-                <a:tint val="50000"/>
-                <a:shade val="100000"/>
-                <a:satMod val="350000"/>
+                <a:lumMod val="99000"/>
+                <a:satMod val="120000"/>
+                <a:shade val="78000"/>
               </a:schemeClr>
             </a:gs>
           </a:gsLst>
-          <a:lin ang="16200000" scaled="0"/>
+          <a:lin ang="5400000" scaled="0"/>
         </a:gradFill>
       </a:fillStyleLst>
       <a:lnStyleLst>
-        <a:ln w="9525" cap="flat" cmpd="sng" algn="ctr">
+        <a:ln w="12700" cap="flat" cmpd="sng" algn="ctr">
           <a:solidFill>
-            <a:schemeClr val="phClr">
-              <a:shade val="95000"/>
-              <a:satMod val="105000"/>
-            </a:schemeClr>
+            <a:schemeClr val="phClr"/>
           </a:solidFill>
           <a:prstDash val="solid"/>
+          <a:miter lim="800000"/>
+        </a:ln>
+        <a:ln w="19050" cap="flat" cmpd="sng" algn="ctr">
+          <a:solidFill>
+            <a:schemeClr val="phClr"/>
+          </a:solidFill>
+          <a:prstDash val="solid"/>
+          <a:miter lim="800000"/>
         </a:ln>
         <a:ln w="25400" cap="flat" cmpd="sng" algn="ctr">
           <a:solidFill>
             <a:schemeClr val="phClr"/>
           </a:solidFill>
           <a:prstDash val="solid"/>
-        </a:ln>
-        <a:ln w="38100" cap="flat" cmpd="sng" algn="ctr">
-          <a:solidFill>
-            <a:schemeClr val="phClr"/>
-          </a:solidFill>
-          <a:prstDash val="solid"/>
+          <a:miter lim="800000"/>
         </a:ln>
       </a:lnStyleLst>
       <a:effectStyleLst>
         <a:effectStyle>
+          <a:effectLst/>
+        </a:effectStyle>
+        <a:effectStyle>
+          <a:effectLst/>
+        </a:effectStyle>
+        <a:effectStyle>
           <a:effectLst>
-            <a:outerShdw blurRad="40000" dist="20000" dir="5400000" rotWithShape="0">
+            <a:outerShdw blurRad="57150" dist="19050" dir="5400000" algn="ctr" rotWithShape="0">
               <a:srgbClr val="000000">
-                <a:alpha val="38000"/>
+                <a:alpha val="63000"/>
               </a:srgbClr>
             </a:outerShdw>
           </a:effectLst>
-        </a:effectStyle>
-        <a:effectStyle>
-          <a:effectLst>
-            <a:outerShdw blurRad="40000" dist="23000" dir="5400000" rotWithShape="0">
-              <a:srgbClr val="000000">
-                <a:alpha val="35000"/>
-              </a:srgbClr>
-            </a:outerShdw>
-          </a:effectLst>
-        </a:effectStyle>
-        <a:effectStyle>
-          <a:effectLst>
-            <a:outerShdw blurRad="40000" dist="23000" dir="5400000" rotWithShape="0">
-              <a:srgbClr val="000000">
-                <a:alpha val="35000"/>
-              </a:srgbClr>
-            </a:outerShdw>
-          </a:effectLst>
-          <a:scene3d>
-            <a:camera prst="orthographicFront">
-              <a:rot lat="0" lon="0" rev="0"/>
-            </a:camera>
-            <a:lightRig rig="threePt" dir="t">
-              <a:rot lat="0" lon="0" rev="1200000"/>
-            </a:lightRig>
-          </a:scene3d>
-          <a:sp3d>
-            <a:bevelT w="63500" h="25400"/>
-          </a:sp3d>
         </a:effectStyle>
       </a:effectStyleLst>
       <a:bgFillStyleLst>
         <a:solidFill>
           <a:schemeClr val="phClr"/>
         </a:solidFill>
+        <a:solidFill>
+          <a:schemeClr val="phClr">
+            <a:tint val="95000"/>
+            <a:satMod val="170000"/>
+          </a:schemeClr>
+        </a:solidFill>
         <a:gradFill rotWithShape="1">
           <a:gsLst>
             <a:gs pos="0">
               <a:schemeClr val="phClr">
-                <a:tint val="40000"/>
-                <a:satMod val="350000"/>
+                <a:tint val="93000"/>
+                <a:satMod val="150000"/>
+                <a:shade val="98000"/>
+                <a:lumMod val="102000"/>
               </a:schemeClr>
             </a:gs>
-            <a:gs pos="40000">
+            <a:gs pos="50000">
               <a:schemeClr val="phClr">
-                <a:tint val="45000"/>
-                <a:shade val="99000"/>
-                <a:satMod val="350000"/>
+                <a:tint val="98000"/>
+                <a:satMod val="130000"/>
+                <a:shade val="90000"/>
+                <a:lumMod val="103000"/>
               </a:schemeClr>
             </a:gs>
             <a:gs pos="100000">
               <a:schemeClr val="phClr">
-                <a:shade val="20000"/>
-                <a:satMod val="255000"/>
+                <a:shade val="63000"/>
+                <a:satMod val="120000"/>
               </a:schemeClr>
             </a:gs>
           </a:gsLst>
-          <a:path path="circle">
-            <a:fillToRect l="50000" t="-80000" r="50000" b="180000"/>
-          </a:path>
-        </a:gradFill>
-        <a:gradFill rotWithShape="1">
-          <a:gsLst>
-            <a:gs pos="0">
-              <a:schemeClr val="phClr">
-                <a:tint val="80000"/>
-                <a:satMod val="300000"/>
-              </a:schemeClr>
-            </a:gs>
-            <a:gs pos="100000">
-              <a:schemeClr val="phClr">
-                <a:shade val="30000"/>
-                <a:satMod val="200000"/>
-              </a:schemeClr>
-            </a:gs>
-          </a:gsLst>
-          <a:path path="circle">
-            <a:fillToRect l="50000" t="50000" r="50000" b="50000"/>
-          </a:path>
+          <a:lin ang="5400000" scaled="0"/>
         </a:gradFill>
       </a:bgFillStyleLst>
     </a:fmtScheme>
   </a:themeElements>
   <a:objectDefaults>
-    <a:spDef>
-      <a:spPr/>
-      <a:bodyPr/>
-      <a:lstStyle/>
-      <a:style>
-        <a:lnRef idx="1">
-          <a:schemeClr val="accent1"/>
-        </a:lnRef>
-        <a:fillRef idx="3">
-          <a:schemeClr val="accent1"/>
-        </a:fillRef>
-        <a:effectRef idx="2">
-          <a:schemeClr val="accent1"/>
-        </a:effectRef>
-        <a:fontRef idx="minor">
-          <a:schemeClr val="lt1"/>
-        </a:fontRef>
-      </a:style>
-    </a:spDef>
     <a:lnDef>
       <a:spPr/>
       <a:bodyPr/>
@@ -11258,5 +11124,10 @@
     </a:lnDef>
   </a:objectDefaults>
   <a:extraClrSchemeLst/>
+  <a:extLst>
+    <a:ext uri="{05A4C25C-085E-4340-85A3-A5531E510DB2}">
+      <thm15:themeFamily xmlns:thm15="http://schemas.microsoft.com/office/thememl/2012/main" name="Office Theme" id="{2E142A2C-CD16-42D6-873A-C26D2A0506FA}" vid="{1BDDFF52-6CD6-40A5-AB3C-68EB2F1E4D0A}"/>
+    </a:ext>
+  </a:extLst>
 </a:theme>
 </file>